--- a/proposals/機種分析/炎炎ノ消防隊2/enenno_analysis.pptx
+++ b/proposals/機種分析/炎炎ノ消防隊2/enenno_analysis.pptx
@@ -12,6 +12,7 @@
     <p:sldId id="260" r:id="rId11"/>
     <p:sldId id="261" r:id="rId12"/>
     <p:sldId id="262" r:id="rId13"/>
+    <p:sldId id="263" r:id="rId14"/>
   </p:sldIdLst>
   <p:sldSz cx="9144000" cy="5143500" type="screen4x3"/>
   <p:notesSz cx="6858000" cy="9144000"/>
@@ -8430,9 +8431,13 @@
                 </a:solidFill>
                 <a:latin typeface="メイリオ"/>
               </a:rPr>
-              <a:t>ストック型ST。ボーナスとのループで
-連続してATを積み上げていく仕組み。
-毎セット継続抽選＋ストック上乗せあり。</a:t>
+              <a:t>【核心：十字目変換フロー】
+リプレイで小V停止
+→ PUSHで十字目に変換（炎色で期待度）
+  白約20% / 青約40% / 赤=確定
+→ 成功→伝導者決戦（ボーナス抽選）
+2連続外れ→3回目は必ず変換成功。
+15G以内未変換→15G再セット。</a:t>
             </a:r>
           </a:p>
         </p:txBody>
@@ -9822,7 +9827,7 @@
                 </a:solidFill>
                 <a:latin typeface="游明朝"/>
               </a:rPr>
-              <a:t>二段階天井 ── 850G + 2,000Gの多層セーフティ</a:t>
+              <a:t>ゲーム体験の核心 ── 自力感×昇格×爆発の3段設計</a:t>
             </a:r>
           </a:p>
         </p:txBody>
@@ -9857,7 +9862,7 @@
                 </a:solidFill>
                 <a:latin typeface="メイリオ"/>
               </a:rPr>
-              <a:t>5/7</a:t>
+              <a:t>5/8</a:t>
             </a:r>
           </a:p>
         </p:txBody>
@@ -9914,16 +9919,18 @@
         <p:spPr>
           <a:xfrm>
             <a:off x="256032" y="658368"/>
-            <a:ext cx="4114800" cy="300000"/>
+            <a:ext cx="1920240" cy="1300000"/>
           </a:xfrm>
           <a:prstGeom prst="rect">
             <a:avLst/>
           </a:prstGeom>
           <a:solidFill>
-            <a:srgbClr val="993300"/>
+            <a:srgbClr val="141C3C"/>
           </a:solidFill>
-          <a:ln>
-            <a:noFill/>
+          <a:ln w="19050">
+            <a:solidFill>
+              <a:srgbClr val="FF8822"/>
+            </a:solidFill>
           </a:ln>
         </p:spPr>
         <p:style>
@@ -9956,8 +9963,8 @@
         </p:nvSpPr>
         <p:spPr>
           <a:xfrm>
-            <a:off x="316032" y="708368"/>
-            <a:ext cx="4034800" cy="230000"/>
+            <a:off x="306032" y="718368"/>
+            <a:ext cx="1840240" cy="380000"/>
           </a:xfrm>
           <a:prstGeom prst="rect">
             <a:avLst/>
@@ -9970,35 +9977,277 @@
           </a:bodyPr>
           <a:lstStyle/>
           <a:p>
-            <a:pPr algn="l"/>
-            <a:r>
-              <a:rPr sz="1100" b="1">
-                <a:solidFill>
-                  <a:srgbClr val="FFBB44"/>
+            <a:pPr algn="ctr"/>
+            <a:r>
+              <a:rPr sz="1000" b="1">
+                <a:solidFill>
+                  <a:srgbClr val="FF8822"/>
                 </a:solidFill>
                 <a:latin typeface="游明朝"/>
               </a:rPr>
-              <a:t>2種類の天井が存在する意義</a:t>
-            </a:r>
-          </a:p>
-        </p:txBody>
-      </p:sp>
-      <p:sp>
-        <p:nvSpPr>
-          <p:cNvPr id="10" name="Rectangle 9"/>
+              <a:t>通常遊技</a:t>
+            </a:r>
+          </a:p>
+        </p:txBody>
+      </p:sp>
+      <p:sp>
+        <p:nvSpPr>
+          <p:cNvPr id="10" name="TextBox 9"/>
+          <p:cNvSpPr txBox="1"/>
+          <p:nvPr/>
+        </p:nvSpPr>
+        <p:spPr>
+          <a:xfrm>
+            <a:off x="296032" y="1108368"/>
+            <a:ext cx="1850240" cy="750000"/>
+          </a:xfrm>
+          <a:prstGeom prst="rect">
+            <a:avLst/>
+          </a:prstGeom>
+          <a:noFill/>
+        </p:spPr>
+        <p:txBody>
+          <a:bodyPr wrap="square">
+            <a:spAutoFit/>
+          </a:bodyPr>
+          <a:lstStyle/>
+          <a:p>
+            <a:pPr algn="ctr"/>
+            <a:r>
+              <a:rPr sz="800" b="0">
+                <a:solidFill>
+                  <a:srgbClr val="E8ECFF"/>
+                </a:solidFill>
+                <a:latin typeface="メイリオ"/>
+              </a:rPr>
+              <a:t>十字目変換・レア役で
+前兆に移行
+規定Gでもボーナスへ</a:t>
+            </a:r>
+          </a:p>
+        </p:txBody>
+      </p:sp>
+      <p:sp>
+        <p:nvSpPr>
+          <p:cNvPr id="11" name="Can 10"/>
           <p:cNvSpPr/>
           <p:nvPr/>
         </p:nvSpPr>
         <p:spPr>
           <a:xfrm>
-            <a:off x="256032" y="958368"/>
-            <a:ext cx="4114800" cy="1210000"/>
-          </a:xfrm>
-          <a:prstGeom prst="rect">
+            <a:off x="2226272" y="1218368"/>
+            <a:ext cx="200000" cy="180000"/>
+          </a:xfrm>
+          <a:prstGeom prst="can">
             <a:avLst/>
           </a:prstGeom>
           <a:solidFill>
-            <a:srgbClr val="0C122C"/>
+            <a:srgbClr val="DD5500"/>
+          </a:solidFill>
+          <a:ln>
+            <a:noFill/>
+          </a:ln>
+        </p:spPr>
+        <p:style>
+          <a:lnRef idx="1">
+            <a:schemeClr val="accent1"/>
+          </a:lnRef>
+          <a:fillRef idx="3">
+            <a:schemeClr val="accent1"/>
+          </a:fillRef>
+          <a:effectRef idx="2">
+            <a:schemeClr val="accent1"/>
+          </a:effectRef>
+          <a:fontRef idx="minor">
+            <a:schemeClr val="lt1"/>
+          </a:fontRef>
+        </p:style>
+        <p:txBody>
+          <a:bodyPr rtlCol="0" anchor="ctr"/>
+          <a:lstStyle/>
+          <a:p>
+            <a:pPr algn="ctr"/>
+          </a:p>
+        </p:txBody>
+      </p:sp>
+      <p:sp>
+        <p:nvSpPr>
+          <p:cNvPr id="12" name="Rectangle 11"/>
+          <p:cNvSpPr/>
+          <p:nvPr/>
+        </p:nvSpPr>
+        <p:spPr>
+          <a:xfrm>
+            <a:off x="2450592" y="658368"/>
+            <a:ext cx="1920240" cy="1300000"/>
+          </a:xfrm>
+          <a:prstGeom prst="rect">
+            <a:avLst/>
+          </a:prstGeom>
+          <a:solidFill>
+            <a:srgbClr val="081228"/>
+          </a:solidFill>
+          <a:ln w="19050">
+            <a:solidFill>
+              <a:srgbClr val="22CCDD"/>
+            </a:solidFill>
+          </a:ln>
+        </p:spPr>
+        <p:style>
+          <a:lnRef idx="1">
+            <a:schemeClr val="accent1"/>
+          </a:lnRef>
+          <a:fillRef idx="3">
+            <a:schemeClr val="accent1"/>
+          </a:fillRef>
+          <a:effectRef idx="2">
+            <a:schemeClr val="accent1"/>
+          </a:effectRef>
+          <a:fontRef idx="minor">
+            <a:schemeClr val="lt1"/>
+          </a:fontRef>
+        </p:style>
+        <p:txBody>
+          <a:bodyPr rtlCol="0" anchor="ctr"/>
+          <a:lstStyle/>
+          <a:p>
+            <a:pPr algn="ctr"/>
+          </a:p>
+        </p:txBody>
+      </p:sp>
+      <p:sp>
+        <p:nvSpPr>
+          <p:cNvPr id="13" name="TextBox 12"/>
+          <p:cNvSpPr txBox="1"/>
+          <p:nvPr/>
+        </p:nvSpPr>
+        <p:spPr>
+          <a:xfrm>
+            <a:off x="2500592" y="718368"/>
+            <a:ext cx="1840240" cy="380000"/>
+          </a:xfrm>
+          <a:prstGeom prst="rect">
+            <a:avLst/>
+          </a:prstGeom>
+          <a:noFill/>
+        </p:spPr>
+        <p:txBody>
+          <a:bodyPr wrap="square">
+            <a:spAutoFit/>
+          </a:bodyPr>
+          <a:lstStyle/>
+          <a:p>
+            <a:pPr algn="ctr"/>
+            <a:r>
+              <a:rPr sz="1000" b="1">
+                <a:solidFill>
+                  <a:srgbClr val="22CCDD"/>
+                </a:solidFill>
+                <a:latin typeface="游明朝"/>
+              </a:rPr>
+              <a:t>アドラリンク
+（3G自力CZ）</a:t>
+            </a:r>
+          </a:p>
+        </p:txBody>
+      </p:sp>
+      <p:sp>
+        <p:nvSpPr>
+          <p:cNvPr id="14" name="TextBox 13"/>
+          <p:cNvSpPr txBox="1"/>
+          <p:nvPr/>
+        </p:nvSpPr>
+        <p:spPr>
+          <a:xfrm>
+            <a:off x="2490592" y="1108368"/>
+            <a:ext cx="1850240" cy="750000"/>
+          </a:xfrm>
+          <a:prstGeom prst="rect">
+            <a:avLst/>
+          </a:prstGeom>
+          <a:noFill/>
+        </p:spPr>
+        <p:txBody>
+          <a:bodyPr wrap="square">
+            <a:spAutoFit/>
+          </a:bodyPr>
+          <a:lstStyle/>
+          <a:p>
+            <a:pPr algn="ctr"/>
+            <a:r>
+              <a:rPr sz="800" b="0">
+                <a:solidFill>
+                  <a:srgbClr val="E8ECFF"/>
+                </a:solidFill>
+                <a:latin typeface="メイリオ"/>
+              </a:rPr>
+              <a:t>リールロック段数で
+期待度が上昇
+成功率約50%
+「自力で掴む」感覚</a:t>
+            </a:r>
+          </a:p>
+        </p:txBody>
+      </p:sp>
+      <p:sp>
+        <p:nvSpPr>
+          <p:cNvPr id="15" name="Can 14"/>
+          <p:cNvSpPr/>
+          <p:nvPr/>
+        </p:nvSpPr>
+        <p:spPr>
+          <a:xfrm>
+            <a:off x="4420832" y="1218368"/>
+            <a:ext cx="200000" cy="180000"/>
+          </a:xfrm>
+          <a:prstGeom prst="can">
+            <a:avLst/>
+          </a:prstGeom>
+          <a:solidFill>
+            <a:srgbClr val="DD5500"/>
+          </a:solidFill>
+          <a:ln>
+            <a:noFill/>
+          </a:ln>
+        </p:spPr>
+        <p:style>
+          <a:lnRef idx="1">
+            <a:schemeClr val="accent1"/>
+          </a:lnRef>
+          <a:fillRef idx="3">
+            <a:schemeClr val="accent1"/>
+          </a:fillRef>
+          <a:effectRef idx="2">
+            <a:schemeClr val="accent1"/>
+          </a:effectRef>
+          <a:fontRef idx="minor">
+            <a:schemeClr val="lt1"/>
+          </a:fontRef>
+        </p:style>
+        <p:txBody>
+          <a:bodyPr rtlCol="0" anchor="ctr"/>
+          <a:lstStyle/>
+          <a:p>
+            <a:pPr algn="ctr"/>
+          </a:p>
+        </p:txBody>
+      </p:sp>
+      <p:sp>
+        <p:nvSpPr>
+          <p:cNvPr id="16" name="Rectangle 15"/>
+          <p:cNvSpPr/>
+          <p:nvPr/>
+        </p:nvSpPr>
+        <p:spPr>
+          <a:xfrm>
+            <a:off x="4645152" y="658368"/>
+            <a:ext cx="1920240" cy="1300000"/>
+          </a:xfrm>
+          <a:prstGeom prst="rect">
+            <a:avLst/>
+          </a:prstGeom>
+          <a:solidFill>
+            <a:srgbClr val="180802"/>
           </a:solidFill>
           <a:ln w="19050">
             <a:solidFill>
@@ -10030,16 +10279,89 @@
       </p:sp>
       <p:sp>
         <p:nvSpPr>
-          <p:cNvPr id="11" name="Rectangle 10"/>
+          <p:cNvPr id="17" name="TextBox 16"/>
+          <p:cNvSpPr txBox="1"/>
+          <p:nvPr/>
+        </p:nvSpPr>
+        <p:spPr>
+          <a:xfrm>
+            <a:off x="4695152" y="718368"/>
+            <a:ext cx="1840240" cy="380000"/>
+          </a:xfrm>
+          <a:prstGeom prst="rect">
+            <a:avLst/>
+          </a:prstGeom>
+          <a:noFill/>
+        </p:spPr>
+        <p:txBody>
+          <a:bodyPr wrap="square">
+            <a:spAutoFit/>
+          </a:bodyPr>
+          <a:lstStyle/>
+          <a:p>
+            <a:pPr algn="ctr"/>
+            <a:r>
+              <a:rPr sz="1000" b="1">
+                <a:solidFill>
+                  <a:srgbClr val="DD5500"/>
+                </a:solidFill>
+                <a:latin typeface="游明朝"/>
+              </a:rPr>
+              <a:t>炎炎激闘
+（15G+α）</a:t>
+            </a:r>
+          </a:p>
+        </p:txBody>
+      </p:sp>
+      <p:sp>
+        <p:nvSpPr>
+          <p:cNvPr id="18" name="TextBox 17"/>
+          <p:cNvSpPr txBox="1"/>
+          <p:nvPr/>
+        </p:nvSpPr>
+        <p:spPr>
+          <a:xfrm>
+            <a:off x="4685152" y="1108368"/>
+            <a:ext cx="1850240" cy="750000"/>
+          </a:xfrm>
+          <a:prstGeom prst="rect">
+            <a:avLst/>
+          </a:prstGeom>
+          <a:noFill/>
+        </p:spPr>
+        <p:txBody>
+          <a:bodyPr wrap="square">
+            <a:spAutoFit/>
+          </a:bodyPr>
+          <a:lstStyle/>
+          <a:p>
+            <a:pPr algn="ctr"/>
+            <a:r>
+              <a:rPr sz="800" b="0">
+                <a:solidFill>
+                  <a:srgbClr val="E8ECFF"/>
+                </a:solidFill>
+                <a:latin typeface="メイリオ"/>
+              </a:rPr>
+              <a:t>リプレイ小V→十字目変換
+→伝導者決戦がループ
+3回目は変換必ず成功</a:t>
+            </a:r>
+          </a:p>
+        </p:txBody>
+      </p:sp>
+      <p:sp>
+        <p:nvSpPr>
+          <p:cNvPr id="19" name="Can 18"/>
           <p:cNvSpPr/>
           <p:nvPr/>
         </p:nvSpPr>
         <p:spPr>
           <a:xfrm>
-            <a:off x="256032" y="958368"/>
-            <a:ext cx="45000" cy="1210000"/>
-          </a:xfrm>
-          <a:prstGeom prst="rect">
+            <a:off x="6615392" y="1218368"/>
+            <a:ext cx="200000" cy="180000"/>
+          </a:xfrm>
+          <a:prstGeom prst="can">
             <a:avLst/>
           </a:prstGeom>
           <a:solidFill>
@@ -10073,14 +10395,59 @@
       </p:sp>
       <p:sp>
         <p:nvSpPr>
-          <p:cNvPr id="12" name="TextBox 11"/>
-          <p:cNvSpPr txBox="1"/>
-          <p:nvPr/>
-        </p:nvSpPr>
-        <p:spPr>
-          <a:xfrm>
-            <a:off x="336032" y="1008368"/>
-            <a:ext cx="4014800" cy="260000"/>
+          <p:cNvPr id="20" name="Rectangle 19"/>
+          <p:cNvSpPr/>
+          <p:nvPr/>
+        </p:nvSpPr>
+        <p:spPr>
+          <a:xfrm>
+            <a:off x="6839712" y="658368"/>
+            <a:ext cx="1920240" cy="1300000"/>
+          </a:xfrm>
+          <a:prstGeom prst="rect">
+            <a:avLst/>
+          </a:prstGeom>
+          <a:solidFill>
+            <a:srgbClr val="140600"/>
+          </a:solidFill>
+          <a:ln w="19050">
+            <a:solidFill>
+              <a:srgbClr val="FFBB44"/>
+            </a:solidFill>
+          </a:ln>
+        </p:spPr>
+        <p:style>
+          <a:lnRef idx="1">
+            <a:schemeClr val="accent1"/>
+          </a:lnRef>
+          <a:fillRef idx="3">
+            <a:schemeClr val="accent1"/>
+          </a:fillRef>
+          <a:effectRef idx="2">
+            <a:schemeClr val="accent1"/>
+          </a:effectRef>
+          <a:fontRef idx="minor">
+            <a:schemeClr val="lt1"/>
+          </a:fontRef>
+        </p:style>
+        <p:txBody>
+          <a:bodyPr rtlCol="0" anchor="ctr"/>
+          <a:lstStyle/>
+          <a:p>
+            <a:pPr algn="ctr"/>
+          </a:p>
+        </p:txBody>
+      </p:sp>
+      <p:sp>
+        <p:nvSpPr>
+          <p:cNvPr id="21" name="TextBox 20"/>
+          <p:cNvSpPr txBox="1"/>
+          <p:nvPr/>
+        </p:nvSpPr>
+        <p:spPr>
+          <a:xfrm>
+            <a:off x="6889712" y="718368"/>
+            <a:ext cx="1840240" cy="380000"/>
           </a:xfrm>
           <a:prstGeom prst="rect">
             <a:avLst/>
@@ -10093,66 +10460,67 @@
           </a:bodyPr>
           <a:lstStyle/>
           <a:p>
-            <a:pPr algn="l"/>
-            <a:r>
-              <a:rPr sz="900" b="1">
-                <a:solidFill>
-                  <a:srgbClr val="DD5500"/>
+            <a:pPr algn="ctr"/>
+            <a:r>
+              <a:rPr sz="1000" b="1">
+                <a:solidFill>
+                  <a:srgbClr val="FFBB44"/>
+                </a:solidFill>
+                <a:latin typeface="游明朝"/>
+              </a:rPr>
+              <a:t>(超)炎炎大戦
+→アドラバースト</a:t>
+            </a:r>
+          </a:p>
+        </p:txBody>
+      </p:sp>
+      <p:sp>
+        <p:nvSpPr>
+          <p:cNvPr id="22" name="TextBox 21"/>
+          <p:cNvSpPr txBox="1"/>
+          <p:nvPr/>
+        </p:nvSpPr>
+        <p:spPr>
+          <a:xfrm>
+            <a:off x="6879712" y="1108368"/>
+            <a:ext cx="1850240" cy="750000"/>
+          </a:xfrm>
+          <a:prstGeom prst="rect">
+            <a:avLst/>
+          </a:prstGeom>
+          <a:noFill/>
+        </p:spPr>
+        <p:txBody>
+          <a:bodyPr wrap="square">
+            <a:spAutoFit/>
+          </a:bodyPr>
+          <a:lstStyle/>
+          <a:p>
+            <a:pPr algn="ctr"/>
+            <a:r>
+              <a:rPr sz="800" b="0">
+                <a:solidFill>
+                  <a:srgbClr val="E8ECFF"/>
                 </a:solidFill>
                 <a:latin typeface="メイリオ"/>
               </a:rPr>
-              <a:t>天井①：ボーナス間 850G</a:t>
-            </a:r>
-          </a:p>
-        </p:txBody>
-      </p:sp>
-      <p:sp>
-        <p:nvSpPr>
-          <p:cNvPr id="13" name="TextBox 12"/>
-          <p:cNvSpPr txBox="1"/>
-          <p:nvPr/>
-        </p:nvSpPr>
-        <p:spPr>
-          <a:xfrm>
-            <a:off x="336032" y="1258368"/>
-            <a:ext cx="4014800" cy="800000"/>
-          </a:xfrm>
-          <a:prstGeom prst="rect">
-            <a:avLst/>
-          </a:prstGeom>
-          <a:noFill/>
-        </p:spPr>
-        <p:txBody>
-          <a:bodyPr wrap="square">
-            <a:spAutoFit/>
-          </a:bodyPr>
-          <a:lstStyle/>
-          <a:p>
-            <a:pPr algn="l"/>
-            <a:r>
-              <a:rPr sz="800" b="0">
-                <a:solidFill>
-                  <a:srgbClr val="E8ECFF"/>
-                </a:solidFill>
-                <a:latin typeface="メイリオ"/>
-              </a:rPr>
-              <a:t>通常遊技でボーナスが850G来ない場合に発動。
-リセット後は650Gに短縮。
-日常的に狙える「基本の天井」として機能。</a:t>
-            </a:r>
-          </a:p>
-        </p:txBody>
-      </p:sp>
-      <p:sp>
-        <p:nvSpPr>
-          <p:cNvPr id="14" name="Rectangle 13"/>
+              <a:t>ループ率80〜90%
+最上位で約2,760枚
+常に「上」が見える設計</a:t>
+            </a:r>
+          </a:p>
+        </p:txBody>
+      </p:sp>
+      <p:sp>
+        <p:nvSpPr>
+          <p:cNvPr id="23" name="Rectangle 22"/>
           <p:cNvSpPr/>
           <p:nvPr/>
         </p:nvSpPr>
         <p:spPr>
           <a:xfrm>
-            <a:off x="256032" y="2238368"/>
-            <a:ext cx="4114800" cy="1210000"/>
+            <a:off x="256032" y="2078368"/>
+            <a:ext cx="4114800" cy="2720000"/>
           </a:xfrm>
           <a:prstGeom prst="rect">
             <a:avLst/>
@@ -10162,7 +10530,7 @@
           </a:solidFill>
           <a:ln w="19050">
             <a:solidFill>
-              <a:srgbClr val="2277FF"/>
+              <a:srgbClr val="22CCDD"/>
             </a:solidFill>
           </a:ln>
         </p:spPr>
@@ -10190,800 +10558,14 @@
       </p:sp>
       <p:sp>
         <p:nvSpPr>
-          <p:cNvPr id="15" name="Rectangle 14"/>
-          <p:cNvSpPr/>
-          <p:nvPr/>
-        </p:nvSpPr>
-        <p:spPr>
-          <a:xfrm>
-            <a:off x="256032" y="2238368"/>
-            <a:ext cx="45000" cy="1210000"/>
-          </a:xfrm>
-          <a:prstGeom prst="rect">
-            <a:avLst/>
-          </a:prstGeom>
-          <a:solidFill>
-            <a:srgbClr val="2277FF"/>
-          </a:solidFill>
-          <a:ln>
-            <a:noFill/>
-          </a:ln>
-        </p:spPr>
-        <p:style>
-          <a:lnRef idx="1">
-            <a:schemeClr val="accent1"/>
-          </a:lnRef>
-          <a:fillRef idx="3">
-            <a:schemeClr val="accent1"/>
-          </a:fillRef>
-          <a:effectRef idx="2">
-            <a:schemeClr val="accent1"/>
-          </a:effectRef>
-          <a:fontRef idx="minor">
-            <a:schemeClr val="lt1"/>
-          </a:fontRef>
-        </p:style>
-        <p:txBody>
-          <a:bodyPr rtlCol="0" anchor="ctr"/>
-          <a:lstStyle/>
-          <a:p>
-            <a:pPr algn="ctr"/>
-          </a:p>
-        </p:txBody>
-      </p:sp>
-      <p:sp>
-        <p:nvSpPr>
-          <p:cNvPr id="16" name="TextBox 15"/>
-          <p:cNvSpPr txBox="1"/>
-          <p:nvPr/>
-        </p:nvSpPr>
-        <p:spPr>
-          <a:xfrm>
-            <a:off x="336032" y="2288368"/>
-            <a:ext cx="4014800" cy="260000"/>
-          </a:xfrm>
-          <a:prstGeom prst="rect">
-            <a:avLst/>
-          </a:prstGeom>
-          <a:noFill/>
-        </p:spPr>
-        <p:txBody>
-          <a:bodyPr wrap="square">
-            <a:spAutoFit/>
-          </a:bodyPr>
-          <a:lstStyle/>
-          <a:p>
-            <a:pPr algn="l"/>
-            <a:r>
-              <a:rPr sz="900" b="1">
-                <a:solidFill>
-                  <a:srgbClr val="2277FF"/>
-                </a:solidFill>
-                <a:latin typeface="メイリオ"/>
-              </a:rPr>
-              <a:t>天井②：炎炎激闘間 2,000G</a:t>
-            </a:r>
-          </a:p>
-        </p:txBody>
-      </p:sp>
-      <p:sp>
-        <p:nvSpPr>
-          <p:cNvPr id="17" name="TextBox 16"/>
-          <p:cNvSpPr txBox="1"/>
-          <p:nvPr/>
-        </p:nvSpPr>
-        <p:spPr>
-          <a:xfrm>
-            <a:off x="336032" y="2538368"/>
-            <a:ext cx="4014800" cy="800000"/>
-          </a:xfrm>
-          <a:prstGeom prst="rect">
-            <a:avLst/>
-          </a:prstGeom>
-          <a:noFill/>
-        </p:spPr>
-        <p:txBody>
-          <a:bodyPr wrap="square">
-            <a:spAutoFit/>
-          </a:bodyPr>
-          <a:lstStyle/>
-          <a:p>
-            <a:pPr algn="l"/>
-            <a:r>
-              <a:rPr sz="800" b="0">
-                <a:solidFill>
-                  <a:srgbClr val="E8ECFF"/>
-                </a:solidFill>
-                <a:latin typeface="メイリオ"/>
-              </a:rPr>
-              <a:t>炎炎激闘（AT）が2,000G来ない場合に発動。
-リセット後は1,500Gに短縮。
-長期ハマり時の最終出口として機能。</a:t>
-            </a:r>
-          </a:p>
-        </p:txBody>
-      </p:sp>
-      <p:sp>
-        <p:nvSpPr>
-          <p:cNvPr id="18" name="Rectangle 17"/>
-          <p:cNvSpPr/>
-          <p:nvPr/>
-        </p:nvSpPr>
-        <p:spPr>
-          <a:xfrm>
-            <a:off x="256032" y="3518368"/>
-            <a:ext cx="4114800" cy="1210000"/>
-          </a:xfrm>
-          <a:prstGeom prst="rect">
-            <a:avLst/>
-          </a:prstGeom>
-          <a:solidFill>
-            <a:srgbClr val="0C122C"/>
-          </a:solidFill>
-          <a:ln w="19050">
-            <a:solidFill>
-              <a:srgbClr val="22CC66"/>
-            </a:solidFill>
-          </a:ln>
-        </p:spPr>
-        <p:style>
-          <a:lnRef idx="1">
-            <a:schemeClr val="accent1"/>
-          </a:lnRef>
-          <a:fillRef idx="3">
-            <a:schemeClr val="accent1"/>
-          </a:fillRef>
-          <a:effectRef idx="2">
-            <a:schemeClr val="accent1"/>
-          </a:effectRef>
-          <a:fontRef idx="minor">
-            <a:schemeClr val="lt1"/>
-          </a:fontRef>
-        </p:style>
-        <p:txBody>
-          <a:bodyPr rtlCol="0" anchor="ctr"/>
-          <a:lstStyle/>
-          <a:p>
-            <a:pPr algn="ctr"/>
-          </a:p>
-        </p:txBody>
-      </p:sp>
-      <p:sp>
-        <p:nvSpPr>
-          <p:cNvPr id="19" name="Rectangle 18"/>
-          <p:cNvSpPr/>
-          <p:nvPr/>
-        </p:nvSpPr>
-        <p:spPr>
-          <a:xfrm>
-            <a:off x="256032" y="3518368"/>
-            <a:ext cx="45000" cy="1210000"/>
-          </a:xfrm>
-          <a:prstGeom prst="rect">
-            <a:avLst/>
-          </a:prstGeom>
-          <a:solidFill>
-            <a:srgbClr val="22CC66"/>
-          </a:solidFill>
-          <a:ln>
-            <a:noFill/>
-          </a:ln>
-        </p:spPr>
-        <p:style>
-          <a:lnRef idx="1">
-            <a:schemeClr val="accent1"/>
-          </a:lnRef>
-          <a:fillRef idx="3">
-            <a:schemeClr val="accent1"/>
-          </a:fillRef>
-          <a:effectRef idx="2">
-            <a:schemeClr val="accent1"/>
-          </a:effectRef>
-          <a:fontRef idx="minor">
-            <a:schemeClr val="lt1"/>
-          </a:fontRef>
-        </p:style>
-        <p:txBody>
-          <a:bodyPr rtlCol="0" anchor="ctr"/>
-          <a:lstStyle/>
-          <a:p>
-            <a:pPr algn="ctr"/>
-          </a:p>
-        </p:txBody>
-      </p:sp>
-      <p:sp>
-        <p:nvSpPr>
-          <p:cNvPr id="20" name="TextBox 19"/>
-          <p:cNvSpPr txBox="1"/>
-          <p:nvPr/>
-        </p:nvSpPr>
-        <p:spPr>
-          <a:xfrm>
-            <a:off x="336032" y="3568368"/>
-            <a:ext cx="4014800" cy="260000"/>
-          </a:xfrm>
-          <a:prstGeom prst="rect">
-            <a:avLst/>
-          </a:prstGeom>
-          <a:noFill/>
-        </p:spPr>
-        <p:txBody>
-          <a:bodyPr wrap="square">
-            <a:spAutoFit/>
-          </a:bodyPr>
-          <a:lstStyle/>
-          <a:p>
-            <a:pPr algn="l"/>
-            <a:r>
-              <a:rPr sz="900" b="1">
-                <a:solidFill>
-                  <a:srgbClr val="22CC66"/>
-                </a:solidFill>
-                <a:latin typeface="メイリオ"/>
-              </a:rPr>
-              <a:t>二段階の相乗効果</a:t>
-            </a:r>
-          </a:p>
-        </p:txBody>
-      </p:sp>
-      <p:sp>
-        <p:nvSpPr>
-          <p:cNvPr id="21" name="TextBox 20"/>
-          <p:cNvSpPr txBox="1"/>
-          <p:nvPr/>
-        </p:nvSpPr>
-        <p:spPr>
-          <a:xfrm>
-            <a:off x="336032" y="3818368"/>
-            <a:ext cx="4014800" cy="800000"/>
-          </a:xfrm>
-          <a:prstGeom prst="rect">
-            <a:avLst/>
-          </a:prstGeom>
-          <a:noFill/>
-        </p:spPr>
-        <p:txBody>
-          <a:bodyPr wrap="square">
-            <a:spAutoFit/>
-          </a:bodyPr>
-          <a:lstStyle/>
-          <a:p>
-            <a:pPr algn="l"/>
-            <a:r>
-              <a:rPr sz="800" b="0">
-                <a:solidFill>
-                  <a:srgbClr val="E8ECFF"/>
-                </a:solidFill>
-                <a:latin typeface="メイリオ"/>
-              </a:rPr>
-              <a:t>第1天井で短期保険、第2天井で長期保険。
-「次の天井まで」という投資計画が立てやすく
-プレイヤーのリスク管理を支援する設計。</a:t>
-            </a:r>
-          </a:p>
-        </p:txBody>
-      </p:sp>
-      <p:sp>
-        <p:nvSpPr>
-          <p:cNvPr id="22" name="Rectangle 21"/>
-          <p:cNvSpPr/>
-          <p:nvPr/>
-        </p:nvSpPr>
-        <p:spPr>
-          <a:xfrm>
-            <a:off x="4572000" y="658368"/>
-            <a:ext cx="4297680" cy="280000"/>
-          </a:xfrm>
-          <a:prstGeom prst="rect">
-            <a:avLst/>
-          </a:prstGeom>
-          <a:solidFill>
-            <a:srgbClr val="141C3C"/>
-          </a:solidFill>
-          <a:ln>
-            <a:noFill/>
-          </a:ln>
-        </p:spPr>
-        <p:style>
-          <a:lnRef idx="1">
-            <a:schemeClr val="accent1"/>
-          </a:lnRef>
-          <a:fillRef idx="3">
-            <a:schemeClr val="accent1"/>
-          </a:fillRef>
-          <a:effectRef idx="2">
-            <a:schemeClr val="accent1"/>
-          </a:effectRef>
-          <a:fontRef idx="minor">
-            <a:schemeClr val="lt1"/>
-          </a:fontRef>
-        </p:style>
-        <p:txBody>
-          <a:bodyPr rtlCol="0" anchor="ctr"/>
-          <a:lstStyle/>
-          <a:p>
-            <a:pPr algn="ctr"/>
-          </a:p>
-        </p:txBody>
-      </p:sp>
-      <p:sp>
-        <p:nvSpPr>
-          <p:cNvPr id="23" name="TextBox 22"/>
-          <p:cNvSpPr txBox="1"/>
-          <p:nvPr/>
-        </p:nvSpPr>
-        <p:spPr>
-          <a:xfrm>
-            <a:off x="4622000" y="703368"/>
-            <a:ext cx="4227680" cy="210000"/>
-          </a:xfrm>
-          <a:prstGeom prst="rect">
-            <a:avLst/>
-          </a:prstGeom>
-          <a:noFill/>
-        </p:spPr>
-        <p:txBody>
-          <a:bodyPr wrap="square">
-            <a:spAutoFit/>
-          </a:bodyPr>
-          <a:lstStyle/>
-          <a:p>
-            <a:pPr algn="l"/>
-            <a:r>
-              <a:rPr sz="1100" b="1">
-                <a:solidFill>
-                  <a:srgbClr val="FFBB44"/>
-                </a:solidFill>
-                <a:latin typeface="游明朝"/>
-              </a:rPr>
-              <a:t>天井狙い：立ち回り別の目安</a:t>
-            </a:r>
-          </a:p>
-        </p:txBody>
-      </p:sp>
-      <p:sp>
-        <p:nvSpPr>
           <p:cNvPr id="24" name="Rectangle 23"/>
           <p:cNvSpPr/>
           <p:nvPr/>
         </p:nvSpPr>
         <p:spPr>
           <a:xfrm>
-            <a:off x="4572000" y="938368"/>
-            <a:ext cx="4297680" cy="1270000"/>
-          </a:xfrm>
-          <a:prstGeom prst="rect">
-            <a:avLst/>
-          </a:prstGeom>
-          <a:solidFill>
-            <a:srgbClr val="0C122C"/>
-          </a:solidFill>
-          <a:ln w="15240">
-            <a:solidFill>
-              <a:srgbClr val="DD5500"/>
-            </a:solidFill>
-          </a:ln>
-        </p:spPr>
-        <p:style>
-          <a:lnRef idx="1">
-            <a:schemeClr val="accent1"/>
-          </a:lnRef>
-          <a:fillRef idx="3">
-            <a:schemeClr val="accent1"/>
-          </a:fillRef>
-          <a:effectRef idx="2">
-            <a:schemeClr val="accent1"/>
-          </a:effectRef>
-          <a:fontRef idx="minor">
-            <a:schemeClr val="lt1"/>
-          </a:fontRef>
-        </p:style>
-        <p:txBody>
-          <a:bodyPr rtlCol="0" anchor="ctr"/>
-          <a:lstStyle/>
-          <a:p>
-            <a:pPr algn="ctr"/>
-          </a:p>
-        </p:txBody>
-      </p:sp>
-      <p:sp>
-        <p:nvSpPr>
-          <p:cNvPr id="25" name="Rectangle 24"/>
-          <p:cNvSpPr/>
-          <p:nvPr/>
-        </p:nvSpPr>
-        <p:spPr>
-          <a:xfrm>
-            <a:off x="4572000" y="938368"/>
-            <a:ext cx="40000" cy="1270000"/>
-          </a:xfrm>
-          <a:prstGeom prst="rect">
-            <a:avLst/>
-          </a:prstGeom>
-          <a:solidFill>
-            <a:srgbClr val="DD5500"/>
-          </a:solidFill>
-          <a:ln>
-            <a:noFill/>
-          </a:ln>
-        </p:spPr>
-        <p:style>
-          <a:lnRef idx="1">
-            <a:schemeClr val="accent1"/>
-          </a:lnRef>
-          <a:fillRef idx="3">
-            <a:schemeClr val="accent1"/>
-          </a:fillRef>
-          <a:effectRef idx="2">
-            <a:schemeClr val="accent1"/>
-          </a:effectRef>
-          <a:fontRef idx="minor">
-            <a:schemeClr val="lt1"/>
-          </a:fontRef>
-        </p:style>
-        <p:txBody>
-          <a:bodyPr rtlCol="0" anchor="ctr"/>
-          <a:lstStyle/>
-          <a:p>
-            <a:pPr algn="ctr"/>
-          </a:p>
-        </p:txBody>
-      </p:sp>
-      <p:sp>
-        <p:nvSpPr>
-          <p:cNvPr id="26" name="TextBox 25"/>
-          <p:cNvSpPr txBox="1"/>
-          <p:nvPr/>
-        </p:nvSpPr>
-        <p:spPr>
-          <a:xfrm>
-            <a:off x="4642000" y="978368"/>
-            <a:ext cx="4207680" cy="240000"/>
-          </a:xfrm>
-          <a:prstGeom prst="rect">
-            <a:avLst/>
-          </a:prstGeom>
-          <a:noFill/>
-        </p:spPr>
-        <p:txBody>
-          <a:bodyPr wrap="square">
-            <a:spAutoFit/>
-          </a:bodyPr>
-          <a:lstStyle/>
-          <a:p>
-            <a:pPr algn="l"/>
-            <a:r>
-              <a:rPr sz="900" b="1">
-                <a:solidFill>
-                  <a:srgbClr val="DD5500"/>
-                </a:solidFill>
-                <a:latin typeface="メイリオ"/>
-              </a:rPr>
-              <a:t>天井①狙い</a:t>
-            </a:r>
-          </a:p>
-        </p:txBody>
-      </p:sp>
-      <p:sp>
-        <p:nvSpPr>
-          <p:cNvPr id="27" name="TextBox 26"/>
-          <p:cNvSpPr txBox="1"/>
-          <p:nvPr/>
-        </p:nvSpPr>
-        <p:spPr>
-          <a:xfrm>
-            <a:off x="4642000" y="1208368"/>
-            <a:ext cx="4207680" cy="220000"/>
-          </a:xfrm>
-          <a:prstGeom prst="rect">
-            <a:avLst/>
-          </a:prstGeom>
-          <a:noFill/>
-        </p:spPr>
-        <p:txBody>
-          <a:bodyPr wrap="square">
-            <a:spAutoFit/>
-          </a:bodyPr>
-          <a:lstStyle/>
-          <a:p>
-            <a:pPr algn="l"/>
-            <a:r>
-              <a:rPr sz="800" b="0">
-                <a:solidFill>
-                  <a:srgbClr val="8888AA"/>
-                </a:solidFill>
-                <a:latin typeface="メイリオ"/>
-              </a:rPr>
-              <a:t>550G〜（リセット後 400G〜）</a:t>
-            </a:r>
-          </a:p>
-        </p:txBody>
-      </p:sp>
-      <p:sp>
-        <p:nvSpPr>
-          <p:cNvPr id="28" name="TextBox 27"/>
-          <p:cNvSpPr txBox="1"/>
-          <p:nvPr/>
-        </p:nvSpPr>
-        <p:spPr>
-          <a:xfrm>
-            <a:off x="4642000" y="1428368"/>
-            <a:ext cx="4207680" cy="650000"/>
-          </a:xfrm>
-          <a:prstGeom prst="rect">
-            <a:avLst/>
-          </a:prstGeom>
-          <a:noFill/>
-        </p:spPr>
-        <p:txBody>
-          <a:bodyPr wrap="square">
-            <a:spAutoFit/>
-          </a:bodyPr>
-          <a:lstStyle/>
-          <a:p>
-            <a:pPr algn="l"/>
-            <a:r>
-              <a:rPr sz="800" b="0">
-                <a:solidFill>
-                  <a:srgbClr val="E8ECFF"/>
-                </a:solidFill>
-                <a:latin typeface="メイリオ"/>
-              </a:rPr>
-              <a:t>最もシンプルな狙い方。
-期待値が取りやすく台数も多い。</a:t>
-            </a:r>
-          </a:p>
-        </p:txBody>
-      </p:sp>
-      <p:sp>
-        <p:nvSpPr>
-          <p:cNvPr id="29" name="Rectangle 28"/>
-          <p:cNvSpPr/>
-          <p:nvPr/>
-        </p:nvSpPr>
-        <p:spPr>
-          <a:xfrm>
-            <a:off x="4572000" y="2268368"/>
-            <a:ext cx="4297680" cy="1270000"/>
-          </a:xfrm>
-          <a:prstGeom prst="rect">
-            <a:avLst/>
-          </a:prstGeom>
-          <a:solidFill>
-            <a:srgbClr val="0C122C"/>
-          </a:solidFill>
-          <a:ln w="15240">
-            <a:solidFill>
-              <a:srgbClr val="2277FF"/>
-            </a:solidFill>
-          </a:ln>
-        </p:spPr>
-        <p:style>
-          <a:lnRef idx="1">
-            <a:schemeClr val="accent1"/>
-          </a:lnRef>
-          <a:fillRef idx="3">
-            <a:schemeClr val="accent1"/>
-          </a:fillRef>
-          <a:effectRef idx="2">
-            <a:schemeClr val="accent1"/>
-          </a:effectRef>
-          <a:fontRef idx="minor">
-            <a:schemeClr val="lt1"/>
-          </a:fontRef>
-        </p:style>
-        <p:txBody>
-          <a:bodyPr rtlCol="0" anchor="ctr"/>
-          <a:lstStyle/>
-          <a:p>
-            <a:pPr algn="ctr"/>
-          </a:p>
-        </p:txBody>
-      </p:sp>
-      <p:sp>
-        <p:nvSpPr>
-          <p:cNvPr id="30" name="Rectangle 29"/>
-          <p:cNvSpPr/>
-          <p:nvPr/>
-        </p:nvSpPr>
-        <p:spPr>
-          <a:xfrm>
-            <a:off x="4572000" y="2268368"/>
-            <a:ext cx="40000" cy="1270000"/>
-          </a:xfrm>
-          <a:prstGeom prst="rect">
-            <a:avLst/>
-          </a:prstGeom>
-          <a:solidFill>
-            <a:srgbClr val="2277FF"/>
-          </a:solidFill>
-          <a:ln>
-            <a:noFill/>
-          </a:ln>
-        </p:spPr>
-        <p:style>
-          <a:lnRef idx="1">
-            <a:schemeClr val="accent1"/>
-          </a:lnRef>
-          <a:fillRef idx="3">
-            <a:schemeClr val="accent1"/>
-          </a:fillRef>
-          <a:effectRef idx="2">
-            <a:schemeClr val="accent1"/>
-          </a:effectRef>
-          <a:fontRef idx="minor">
-            <a:schemeClr val="lt1"/>
-          </a:fontRef>
-        </p:style>
-        <p:txBody>
-          <a:bodyPr rtlCol="0" anchor="ctr"/>
-          <a:lstStyle/>
-          <a:p>
-            <a:pPr algn="ctr"/>
-          </a:p>
-        </p:txBody>
-      </p:sp>
-      <p:sp>
-        <p:nvSpPr>
-          <p:cNvPr id="31" name="TextBox 30"/>
-          <p:cNvSpPr txBox="1"/>
-          <p:nvPr/>
-        </p:nvSpPr>
-        <p:spPr>
-          <a:xfrm>
-            <a:off x="4642000" y="2308368"/>
-            <a:ext cx="4207680" cy="240000"/>
-          </a:xfrm>
-          <a:prstGeom prst="rect">
-            <a:avLst/>
-          </a:prstGeom>
-          <a:noFill/>
-        </p:spPr>
-        <p:txBody>
-          <a:bodyPr wrap="square">
-            <a:spAutoFit/>
-          </a:bodyPr>
-          <a:lstStyle/>
-          <a:p>
-            <a:pPr algn="l"/>
-            <a:r>
-              <a:rPr sz="900" b="1">
-                <a:solidFill>
-                  <a:srgbClr val="2277FF"/>
-                </a:solidFill>
-                <a:latin typeface="メイリオ"/>
-              </a:rPr>
-              <a:t>天井②狙い</a:t>
-            </a:r>
-          </a:p>
-        </p:txBody>
-      </p:sp>
-      <p:sp>
-        <p:nvSpPr>
-          <p:cNvPr id="32" name="TextBox 31"/>
-          <p:cNvSpPr txBox="1"/>
-          <p:nvPr/>
-        </p:nvSpPr>
-        <p:spPr>
-          <a:xfrm>
-            <a:off x="4642000" y="2538368"/>
-            <a:ext cx="4207680" cy="220000"/>
-          </a:xfrm>
-          <a:prstGeom prst="rect">
-            <a:avLst/>
-          </a:prstGeom>
-          <a:noFill/>
-        </p:spPr>
-        <p:txBody>
-          <a:bodyPr wrap="square">
-            <a:spAutoFit/>
-          </a:bodyPr>
-          <a:lstStyle/>
-          <a:p>
-            <a:pPr algn="l"/>
-            <a:r>
-              <a:rPr sz="800" b="0">
-                <a:solidFill>
-                  <a:srgbClr val="8888AA"/>
-                </a:solidFill>
-                <a:latin typeface="メイリオ"/>
-              </a:rPr>
-              <a:t>1,500G〜（リセット後 1,200G〜）</a:t>
-            </a:r>
-          </a:p>
-        </p:txBody>
-      </p:sp>
-      <p:sp>
-        <p:nvSpPr>
-          <p:cNvPr id="33" name="TextBox 32"/>
-          <p:cNvSpPr txBox="1"/>
-          <p:nvPr/>
-        </p:nvSpPr>
-        <p:spPr>
-          <a:xfrm>
-            <a:off x="4642000" y="2758368"/>
-            <a:ext cx="4207680" cy="650000"/>
-          </a:xfrm>
-          <a:prstGeom prst="rect">
-            <a:avLst/>
-          </a:prstGeom>
-          <a:noFill/>
-        </p:spPr>
-        <p:txBody>
-          <a:bodyPr wrap="square">
-            <a:spAutoFit/>
-          </a:bodyPr>
-          <a:lstStyle/>
-          <a:p>
-            <a:pPr algn="l"/>
-            <a:r>
-              <a:rPr sz="800" b="0">
-                <a:solidFill>
-                  <a:srgbClr val="E8ECFF"/>
-                </a:solidFill>
-                <a:latin typeface="メイリオ"/>
-              </a:rPr>
-              <a:t>投資が大きいが発動時の出玉も大きい。
-期待収支プラスになりやすい。</a:t>
-            </a:r>
-          </a:p>
-        </p:txBody>
-      </p:sp>
-      <p:sp>
-        <p:nvSpPr>
-          <p:cNvPr id="34" name="Rectangle 33"/>
-          <p:cNvSpPr/>
-          <p:nvPr/>
-        </p:nvSpPr>
-        <p:spPr>
-          <a:xfrm>
-            <a:off x="4572000" y="3598368"/>
-            <a:ext cx="4297680" cy="1270000"/>
-          </a:xfrm>
-          <a:prstGeom prst="rect">
-            <a:avLst/>
-          </a:prstGeom>
-          <a:solidFill>
-            <a:srgbClr val="0C122C"/>
-          </a:solidFill>
-          <a:ln w="15240">
-            <a:solidFill>
-              <a:srgbClr val="22CCDD"/>
-            </a:solidFill>
-          </a:ln>
-        </p:spPr>
-        <p:style>
-          <a:lnRef idx="1">
-            <a:schemeClr val="accent1"/>
-          </a:lnRef>
-          <a:fillRef idx="3">
-            <a:schemeClr val="accent1"/>
-          </a:fillRef>
-          <a:effectRef idx="2">
-            <a:schemeClr val="accent1"/>
-          </a:effectRef>
-          <a:fontRef idx="minor">
-            <a:schemeClr val="lt1"/>
-          </a:fontRef>
-        </p:style>
-        <p:txBody>
-          <a:bodyPr rtlCol="0" anchor="ctr"/>
-          <a:lstStyle/>
-          <a:p>
-            <a:pPr algn="ctr"/>
-          </a:p>
-        </p:txBody>
-      </p:sp>
-      <p:sp>
-        <p:nvSpPr>
-          <p:cNvPr id="35" name="Rectangle 34"/>
-          <p:cNvSpPr/>
-          <p:nvPr/>
-        </p:nvSpPr>
-        <p:spPr>
-          <a:xfrm>
-            <a:off x="4572000" y="3598368"/>
-            <a:ext cx="40000" cy="1270000"/>
+            <a:off x="256032" y="2078368"/>
+            <a:ext cx="45000" cy="2720000"/>
           </a:xfrm>
           <a:prstGeom prst="rect">
             <a:avLst/>
@@ -11019,14 +10601,14 @@
       </p:sp>
       <p:sp>
         <p:nvSpPr>
-          <p:cNvPr id="36" name="TextBox 35"/>
-          <p:cNvSpPr txBox="1"/>
-          <p:nvPr/>
-        </p:nvSpPr>
-        <p:spPr>
-          <a:xfrm>
-            <a:off x="4642000" y="3638368"/>
-            <a:ext cx="4207680" cy="240000"/>
+          <p:cNvPr id="25" name="TextBox 24"/>
+          <p:cNvSpPr txBox="1"/>
+          <p:nvPr/>
+        </p:nvSpPr>
+        <p:spPr>
+          <a:xfrm>
+            <a:off x="331032" y="2123368"/>
+            <a:ext cx="4014800" cy="260000"/>
           </a:xfrm>
           <a:prstGeom prst="rect">
             <a:avLst/>
@@ -11041,27 +10623,159 @@
           <a:p>
             <a:pPr algn="l"/>
             <a:r>
-              <a:rPr sz="900" b="1">
+              <a:rPr sz="1100" b="1">
                 <a:solidFill>
                   <a:srgbClr val="22CCDD"/>
                 </a:solidFill>
+                <a:latin typeface="游明朝"/>
+              </a:rPr>
+              <a:t>アドラリンクの「自力感」設計</a:t>
+            </a:r>
+          </a:p>
+        </p:txBody>
+      </p:sp>
+      <p:sp>
+        <p:nvSpPr>
+          <p:cNvPr id="26" name="TextBox 25"/>
+          <p:cNvSpPr txBox="1"/>
+          <p:nvPr/>
+        </p:nvSpPr>
+        <p:spPr>
+          <a:xfrm>
+            <a:off x="331032" y="2378368"/>
+            <a:ext cx="4014800" cy="2360000"/>
+          </a:xfrm>
+          <a:prstGeom prst="rect">
+            <a:avLst/>
+          </a:prstGeom>
+          <a:noFill/>
+        </p:spPr>
+        <p:txBody>
+          <a:bodyPr wrap="square">
+            <a:spAutoFit/>
+          </a:bodyPr>
+          <a:lstStyle/>
+          <a:p>
+            <a:pPr algn="l"/>
+            <a:r>
+              <a:rPr sz="800" b="0">
+                <a:solidFill>
+                  <a:srgbClr val="E8ECFF"/>
+                </a:solidFill>
                 <a:latin typeface="メイリオ"/>
               </a:rPr>
-              <a:t>両天井複合</a:t>
-            </a:r>
-          </a:p>
-        </p:txBody>
-      </p:sp>
-      <p:sp>
-        <p:nvSpPr>
-          <p:cNvPr id="37" name="TextBox 36"/>
-          <p:cNvSpPr txBox="1"/>
-          <p:nvPr/>
-        </p:nvSpPr>
-        <p:spPr>
-          <a:xfrm>
-            <a:off x="4642000" y="3868368"/>
-            <a:ext cx="4207680" cy="220000"/>
+              <a:t>アドラリンクは通常遊技中に割り込む
+3GのプチCZ。
+【リールロック段数による演出設計】
+1段ロック → チャンス
+2段ロック → 期待度大幅アップ
+3段ロック → 激アツ（成功率大幅上昇）
+「何段ロックがかかるか」を見守る
+3Gの緊張感が打感の核心を作る。
+→ ボーナスを「もらう」ではなく
+  「自分で掴んだ」感覚を生む設計</a:t>
+            </a:r>
+          </a:p>
+        </p:txBody>
+      </p:sp>
+      <p:sp>
+        <p:nvSpPr>
+          <p:cNvPr id="27" name="Rectangle 26"/>
+          <p:cNvSpPr/>
+          <p:nvPr/>
+        </p:nvSpPr>
+        <p:spPr>
+          <a:xfrm>
+            <a:off x="4572000" y="2078368"/>
+            <a:ext cx="4297680" cy="2720000"/>
+          </a:xfrm>
+          <a:prstGeom prst="rect">
+            <a:avLst/>
+          </a:prstGeom>
+          <a:solidFill>
+            <a:srgbClr val="120802"/>
+          </a:solidFill>
+          <a:ln w="19050">
+            <a:solidFill>
+              <a:srgbClr val="FFBB44"/>
+            </a:solidFill>
+          </a:ln>
+        </p:spPr>
+        <p:style>
+          <a:lnRef idx="1">
+            <a:schemeClr val="accent1"/>
+          </a:lnRef>
+          <a:fillRef idx="3">
+            <a:schemeClr val="accent1"/>
+          </a:fillRef>
+          <a:effectRef idx="2">
+            <a:schemeClr val="accent1"/>
+          </a:effectRef>
+          <a:fontRef idx="minor">
+            <a:schemeClr val="lt1"/>
+          </a:fontRef>
+        </p:style>
+        <p:txBody>
+          <a:bodyPr rtlCol="0" anchor="ctr"/>
+          <a:lstStyle/>
+          <a:p>
+            <a:pPr algn="ctr"/>
+          </a:p>
+        </p:txBody>
+      </p:sp>
+      <p:sp>
+        <p:nvSpPr>
+          <p:cNvPr id="28" name="Rectangle 27"/>
+          <p:cNvSpPr/>
+          <p:nvPr/>
+        </p:nvSpPr>
+        <p:spPr>
+          <a:xfrm>
+            <a:off x="4572000" y="2078368"/>
+            <a:ext cx="45000" cy="2720000"/>
+          </a:xfrm>
+          <a:prstGeom prst="rect">
+            <a:avLst/>
+          </a:prstGeom>
+          <a:solidFill>
+            <a:srgbClr val="FFBB44"/>
+          </a:solidFill>
+          <a:ln>
+            <a:noFill/>
+          </a:ln>
+        </p:spPr>
+        <p:style>
+          <a:lnRef idx="1">
+            <a:schemeClr val="accent1"/>
+          </a:lnRef>
+          <a:fillRef idx="3">
+            <a:schemeClr val="accent1"/>
+          </a:fillRef>
+          <a:effectRef idx="2">
+            <a:schemeClr val="accent1"/>
+          </a:effectRef>
+          <a:fontRef idx="minor">
+            <a:schemeClr val="lt1"/>
+          </a:fontRef>
+        </p:style>
+        <p:txBody>
+          <a:bodyPr rtlCol="0" anchor="ctr"/>
+          <a:lstStyle/>
+          <a:p>
+            <a:pPr algn="ctr"/>
+          </a:p>
+        </p:txBody>
+      </p:sp>
+      <p:sp>
+        <p:nvSpPr>
+          <p:cNvPr id="29" name="TextBox 28"/>
+          <p:cNvSpPr txBox="1"/>
+          <p:nvPr/>
+        </p:nvSpPr>
+        <p:spPr>
+          <a:xfrm>
+            <a:off x="4647000" y="2123368"/>
+            <a:ext cx="4197680" cy="260000"/>
           </a:xfrm>
           <a:prstGeom prst="rect">
             <a:avLst/>
@@ -11076,56 +10790,65 @@
           <a:p>
             <a:pPr algn="l"/>
             <a:r>
+              <a:rPr sz="1100" b="1">
+                <a:solidFill>
+                  <a:srgbClr val="FFBB44"/>
+                </a:solidFill>
+                <a:latin typeface="游明朝"/>
+              </a:rPr>
+              <a:t>昇格・爆発の多層設計</a:t>
+            </a:r>
+          </a:p>
+        </p:txBody>
+      </p:sp>
+      <p:sp>
+        <p:nvSpPr>
+          <p:cNvPr id="30" name="TextBox 29"/>
+          <p:cNvSpPr txBox="1"/>
+          <p:nvPr/>
+        </p:nvSpPr>
+        <p:spPr>
+          <a:xfrm>
+            <a:off x="4647000" y="2378368"/>
+            <a:ext cx="4197680" cy="2360000"/>
+          </a:xfrm>
+          <a:prstGeom prst="rect">
+            <a:avLst/>
+          </a:prstGeom>
+          <a:noFill/>
+        </p:spPr>
+        <p:txBody>
+          <a:bodyPr wrap="square">
+            <a:spAutoFit/>
+          </a:bodyPr>
+          <a:lstStyle/>
+          <a:p>
+            <a:pPr algn="l"/>
+            <a:r>
               <a:rPr sz="800" b="0">
                 <a:solidFill>
-                  <a:srgbClr val="8888AA"/>
+                  <a:srgbClr val="E8ECFF"/>
                 </a:solidFill>
                 <a:latin typeface="メイリオ"/>
               </a:rPr>
-              <a:t>状況に応じた判断が必要</a:t>
-            </a:r>
-          </a:p>
-        </p:txBody>
-      </p:sp>
-      <p:sp>
-        <p:nvSpPr>
-          <p:cNvPr id="38" name="TextBox 37"/>
-          <p:cNvSpPr txBox="1"/>
-          <p:nvPr/>
-        </p:nvSpPr>
-        <p:spPr>
-          <a:xfrm>
-            <a:off x="4642000" y="4088368"/>
-            <a:ext cx="4207680" cy="650000"/>
-          </a:xfrm>
-          <a:prstGeom prst="rect">
-            <a:avLst/>
-          </a:prstGeom>
-          <a:noFill/>
-        </p:spPr>
-        <p:txBody>
-          <a:bodyPr wrap="square">
-            <a:spAutoFit/>
-          </a:bodyPr>
-          <a:lstStyle/>
-          <a:p>
-            <a:pPr algn="l"/>
-            <a:r>
-              <a:rPr sz="800" b="0">
-                <a:solidFill>
-                  <a:srgbClr val="E8ECFF"/>
-                </a:solidFill>
-                <a:latin typeface="メイリオ"/>
-              </a:rPr>
-              <a:t>天井①+②の距離を計算した
-高度な立ち回り。データ確認が必須。</a:t>
-            </a:r>
-          </a:p>
-        </p:txBody>
-      </p:sp>
-      <p:sp>
-        <p:nvSpPr>
-          <p:cNvPr id="39" name="TextBox 38"/>
+              <a:t>常に「上の状態」が存在することで
+プレイヤーの目標が途切れない。
+炎炎激闘（15G+α）
+  ↓ ストック×ボーナスループ80%以上
+(超)炎炎大戦（ループ率80〜90%）
+  ↓ 特殊ルートで
+アドラバースト（期待約2,760枚）
+【ストック型の心理的安心感】
+1セット15Gで終わっても
+ストックがあれば「また来る」という
+安堵感が投資継続につながる。</a:t>
+            </a:r>
+          </a:p>
+        </p:txBody>
+      </p:sp>
+      <p:sp>
+        <p:nvSpPr>
+          <p:cNvPr id="31" name="TextBox 30"/>
           <p:cNvSpPr txBox="1"/>
           <p:nvPr/>
         </p:nvSpPr>
@@ -11316,7 +11039,7 @@
                 </a:solidFill>
                 <a:latin typeface="游明朝"/>
               </a:rPr>
-              <a:t>設定判別 ── REGボーナスのキャラシナリオが最重要</a:t>
+              <a:t>二段階天井 ── 850G + 2,000Gの多層セーフティ</a:t>
             </a:r>
           </a:p>
         </p:txBody>
@@ -11351,7 +11074,7 @@
                 </a:solidFill>
                 <a:latin typeface="メイリオ"/>
               </a:rPr>
-              <a:t>6/7</a:t>
+              <a:t>6/8</a:t>
             </a:r>
           </a:p>
         </p:txBody>
@@ -11408,7 +11131,130 @@
         <p:spPr>
           <a:xfrm>
             <a:off x="256032" y="658368"/>
-            <a:ext cx="8631936" cy="310000"/>
+            <a:ext cx="4114800" cy="300000"/>
+          </a:xfrm>
+          <a:prstGeom prst="rect">
+            <a:avLst/>
+          </a:prstGeom>
+          <a:solidFill>
+            <a:srgbClr val="993300"/>
+          </a:solidFill>
+          <a:ln>
+            <a:noFill/>
+          </a:ln>
+        </p:spPr>
+        <p:style>
+          <a:lnRef idx="1">
+            <a:schemeClr val="accent1"/>
+          </a:lnRef>
+          <a:fillRef idx="3">
+            <a:schemeClr val="accent1"/>
+          </a:fillRef>
+          <a:effectRef idx="2">
+            <a:schemeClr val="accent1"/>
+          </a:effectRef>
+          <a:fontRef idx="minor">
+            <a:schemeClr val="lt1"/>
+          </a:fontRef>
+        </p:style>
+        <p:txBody>
+          <a:bodyPr rtlCol="0" anchor="ctr"/>
+          <a:lstStyle/>
+          <a:p>
+            <a:pPr algn="ctr"/>
+          </a:p>
+        </p:txBody>
+      </p:sp>
+      <p:sp>
+        <p:nvSpPr>
+          <p:cNvPr id="9" name="TextBox 8"/>
+          <p:cNvSpPr txBox="1"/>
+          <p:nvPr/>
+        </p:nvSpPr>
+        <p:spPr>
+          <a:xfrm>
+            <a:off x="316032" y="708368"/>
+            <a:ext cx="4034800" cy="230000"/>
+          </a:xfrm>
+          <a:prstGeom prst="rect">
+            <a:avLst/>
+          </a:prstGeom>
+          <a:noFill/>
+        </p:spPr>
+        <p:txBody>
+          <a:bodyPr wrap="square">
+            <a:spAutoFit/>
+          </a:bodyPr>
+          <a:lstStyle/>
+          <a:p>
+            <a:pPr algn="l"/>
+            <a:r>
+              <a:rPr sz="1100" b="1">
+                <a:solidFill>
+                  <a:srgbClr val="FFBB44"/>
+                </a:solidFill>
+                <a:latin typeface="游明朝"/>
+              </a:rPr>
+              <a:t>2種類の天井が存在する意義</a:t>
+            </a:r>
+          </a:p>
+        </p:txBody>
+      </p:sp>
+      <p:sp>
+        <p:nvSpPr>
+          <p:cNvPr id="10" name="Rectangle 9"/>
+          <p:cNvSpPr/>
+          <p:nvPr/>
+        </p:nvSpPr>
+        <p:spPr>
+          <a:xfrm>
+            <a:off x="256032" y="958368"/>
+            <a:ext cx="4114800" cy="1210000"/>
+          </a:xfrm>
+          <a:prstGeom prst="rect">
+            <a:avLst/>
+          </a:prstGeom>
+          <a:solidFill>
+            <a:srgbClr val="0C122C"/>
+          </a:solidFill>
+          <a:ln w="19050">
+            <a:solidFill>
+              <a:srgbClr val="DD5500"/>
+            </a:solidFill>
+          </a:ln>
+        </p:spPr>
+        <p:style>
+          <a:lnRef idx="1">
+            <a:schemeClr val="accent1"/>
+          </a:lnRef>
+          <a:fillRef idx="3">
+            <a:schemeClr val="accent1"/>
+          </a:fillRef>
+          <a:effectRef idx="2">
+            <a:schemeClr val="accent1"/>
+          </a:effectRef>
+          <a:fontRef idx="minor">
+            <a:schemeClr val="lt1"/>
+          </a:fontRef>
+        </p:style>
+        <p:txBody>
+          <a:bodyPr rtlCol="0" anchor="ctr"/>
+          <a:lstStyle/>
+          <a:p>
+            <a:pPr algn="ctr"/>
+          </a:p>
+        </p:txBody>
+      </p:sp>
+      <p:sp>
+        <p:nvSpPr>
+          <p:cNvPr id="11" name="Rectangle 10"/>
+          <p:cNvSpPr/>
+          <p:nvPr/>
+        </p:nvSpPr>
+        <p:spPr>
+          <a:xfrm>
+            <a:off x="256032" y="958368"/>
+            <a:ext cx="45000" cy="1210000"/>
           </a:xfrm>
           <a:prstGeom prst="rect">
             <a:avLst/>
@@ -11444,14 +11290,14 @@
       </p:sp>
       <p:sp>
         <p:nvSpPr>
-          <p:cNvPr id="9" name="TextBox 8"/>
-          <p:cNvSpPr txBox="1"/>
-          <p:nvPr/>
-        </p:nvSpPr>
-        <p:spPr>
-          <a:xfrm>
-            <a:off x="306032" y="708368"/>
-            <a:ext cx="8561936" cy="240000"/>
+          <p:cNvPr id="12" name="TextBox 11"/>
+          <p:cNvSpPr txBox="1"/>
+          <p:nvPr/>
+        </p:nvSpPr>
+        <p:spPr>
+          <a:xfrm>
+            <a:off x="336032" y="1008368"/>
+            <a:ext cx="4014800" cy="260000"/>
           </a:xfrm>
           <a:prstGeom prst="rect">
             <a:avLst/>
@@ -11466,27 +11312,64 @@
           <a:p>
             <a:pPr algn="l"/>
             <a:r>
-              <a:rPr sz="1000" b="1">
-                <a:solidFill>
-                  <a:srgbClr val="05091E"/>
+              <a:rPr sz="900" b="1">
+                <a:solidFill>
+                  <a:srgbClr val="DD5500"/>
                 </a:solidFill>
                 <a:latin typeface="メイリオ"/>
               </a:rPr>
-              <a:t>REGボーナス中 ── キャラ紹介シナリオによる設定示唆（最重要）</a:t>
-            </a:r>
-          </a:p>
-        </p:txBody>
-      </p:sp>
-      <p:sp>
-        <p:nvSpPr>
-          <p:cNvPr id="10" name="Rectangle 9"/>
+              <a:t>天井①：ボーナス間 850G</a:t>
+            </a:r>
+          </a:p>
+        </p:txBody>
+      </p:sp>
+      <p:sp>
+        <p:nvSpPr>
+          <p:cNvPr id="13" name="TextBox 12"/>
+          <p:cNvSpPr txBox="1"/>
+          <p:nvPr/>
+        </p:nvSpPr>
+        <p:spPr>
+          <a:xfrm>
+            <a:off x="336032" y="1258368"/>
+            <a:ext cx="4014800" cy="800000"/>
+          </a:xfrm>
+          <a:prstGeom prst="rect">
+            <a:avLst/>
+          </a:prstGeom>
+          <a:noFill/>
+        </p:spPr>
+        <p:txBody>
+          <a:bodyPr wrap="square">
+            <a:spAutoFit/>
+          </a:bodyPr>
+          <a:lstStyle/>
+          <a:p>
+            <a:pPr algn="l"/>
+            <a:r>
+              <a:rPr sz="800" b="0">
+                <a:solidFill>
+                  <a:srgbClr val="E8ECFF"/>
+                </a:solidFill>
+                <a:latin typeface="メイリオ"/>
+              </a:rPr>
+              <a:t>通常遊技でボーナスが850G来ない場合に発動。
+リセット後は650Gに短縮。
+日常的に狙える「基本の天井」として機能。</a:t>
+            </a:r>
+          </a:p>
+        </p:txBody>
+      </p:sp>
+      <p:sp>
+        <p:nvSpPr>
+          <p:cNvPr id="14" name="Rectangle 13"/>
           <p:cNvSpPr/>
           <p:nvPr/>
         </p:nvSpPr>
         <p:spPr>
           <a:xfrm>
-            <a:off x="276032" y="968368"/>
-            <a:ext cx="2842312" cy="800000"/>
+            <a:off x="256032" y="2238368"/>
+            <a:ext cx="4114800" cy="1210000"/>
           </a:xfrm>
           <a:prstGeom prst="rect">
             <a:avLst/>
@@ -11494,9 +11377,9 @@
           <a:solidFill>
             <a:srgbClr val="0C122C"/>
           </a:solidFill>
-          <a:ln w="25400">
+          <a:ln w="19050">
             <a:solidFill>
-              <a:srgbClr val="FF8822"/>
+              <a:srgbClr val="2277FF"/>
             </a:solidFill>
           </a:ln>
         </p:spPr>
@@ -11524,20 +11407,20 @@
       </p:sp>
       <p:sp>
         <p:nvSpPr>
-          <p:cNvPr id="11" name="Rectangle 10"/>
+          <p:cNvPr id="15" name="Rectangle 14"/>
           <p:cNvSpPr/>
           <p:nvPr/>
         </p:nvSpPr>
         <p:spPr>
           <a:xfrm>
-            <a:off x="276032" y="968368"/>
-            <a:ext cx="45000" cy="800000"/>
+            <a:off x="256032" y="2238368"/>
+            <a:ext cx="45000" cy="1210000"/>
           </a:xfrm>
           <a:prstGeom prst="rect">
             <a:avLst/>
           </a:prstGeom>
           <a:solidFill>
-            <a:srgbClr val="FF8822"/>
+            <a:srgbClr val="2277FF"/>
           </a:solidFill>
           <a:ln>
             <a:noFill/>
@@ -11567,14 +11450,14 @@
       </p:sp>
       <p:sp>
         <p:nvSpPr>
-          <p:cNvPr id="12" name="TextBox 11"/>
-          <p:cNvSpPr txBox="1"/>
-          <p:nvPr/>
-        </p:nvSpPr>
-        <p:spPr>
-          <a:xfrm>
-            <a:off x="346032" y="1018368"/>
-            <a:ext cx="2757312" cy="330000"/>
+          <p:cNvPr id="16" name="TextBox 15"/>
+          <p:cNvSpPr txBox="1"/>
+          <p:nvPr/>
+        </p:nvSpPr>
+        <p:spPr>
+          <a:xfrm>
+            <a:off x="336032" y="2288368"/>
+            <a:ext cx="4014800" cy="260000"/>
           </a:xfrm>
           <a:prstGeom prst="rect">
             <a:avLst/>
@@ -11587,29 +11470,29 @@
           </a:bodyPr>
           <a:lstStyle/>
           <a:p>
-            <a:pPr algn="ctr"/>
-            <a:r>
-              <a:rPr sz="1200" b="1">
-                <a:solidFill>
-                  <a:srgbClr val="FF8822"/>
-                </a:solidFill>
-                <a:latin typeface="游明朝"/>
-              </a:rPr>
-              <a:t>黒野</a:t>
-            </a:r>
-          </a:p>
-        </p:txBody>
-      </p:sp>
-      <p:sp>
-        <p:nvSpPr>
-          <p:cNvPr id="13" name="TextBox 12"/>
-          <p:cNvSpPr txBox="1"/>
-          <p:nvPr/>
-        </p:nvSpPr>
-        <p:spPr>
-          <a:xfrm>
-            <a:off x="346032" y="1358368"/>
-            <a:ext cx="2757312" cy="340000"/>
+            <a:pPr algn="l"/>
+            <a:r>
+              <a:rPr sz="900" b="1">
+                <a:solidFill>
+                  <a:srgbClr val="2277FF"/>
+                </a:solidFill>
+                <a:latin typeface="メイリオ"/>
+              </a:rPr>
+              <a:t>天井②：炎炎激闘間 2,000G</a:t>
+            </a:r>
+          </a:p>
+        </p:txBody>
+      </p:sp>
+      <p:sp>
+        <p:nvSpPr>
+          <p:cNvPr id="17" name="TextBox 16"/>
+          <p:cNvSpPr txBox="1"/>
+          <p:nvPr/>
+        </p:nvSpPr>
+        <p:spPr>
+          <a:xfrm>
+            <a:off x="336032" y="2538368"/>
+            <a:ext cx="4014800" cy="800000"/>
           </a:xfrm>
           <a:prstGeom prst="rect">
             <a:avLst/>
@@ -11622,30 +11505,31 @@
           </a:bodyPr>
           <a:lstStyle/>
           <a:p>
-            <a:pPr algn="ctr"/>
-            <a:r>
-              <a:rPr sz="1000" b="1">
-                <a:solidFill>
-                  <a:srgbClr val="FFBB44"/>
+            <a:pPr algn="l"/>
+            <a:r>
+              <a:rPr sz="800" b="0">
+                <a:solidFill>
+                  <a:srgbClr val="E8ECFF"/>
                 </a:solidFill>
                 <a:latin typeface="メイリオ"/>
               </a:rPr>
-              <a:t>設定4以上
-確定</a:t>
-            </a:r>
-          </a:p>
-        </p:txBody>
-      </p:sp>
-      <p:sp>
-        <p:nvSpPr>
-          <p:cNvPr id="14" name="Rectangle 13"/>
+              <a:t>炎炎激闘（AT）が2,000G来ない場合に発動。
+リセット後は1,500Gに短縮。
+長期ハマり時の最終出口として機能。</a:t>
+            </a:r>
+          </a:p>
+        </p:txBody>
+      </p:sp>
+      <p:sp>
+        <p:nvSpPr>
+          <p:cNvPr id="18" name="Rectangle 17"/>
           <p:cNvSpPr/>
           <p:nvPr/>
         </p:nvSpPr>
         <p:spPr>
           <a:xfrm>
-            <a:off x="3153344" y="968368"/>
-            <a:ext cx="2842312" cy="800000"/>
+            <a:off x="256032" y="3518368"/>
+            <a:ext cx="4114800" cy="1210000"/>
           </a:xfrm>
           <a:prstGeom prst="rect">
             <a:avLst/>
@@ -11653,9 +11537,9 @@
           <a:solidFill>
             <a:srgbClr val="0C122C"/>
           </a:solidFill>
-          <a:ln w="25400">
+          <a:ln w="19050">
             <a:solidFill>
-              <a:srgbClr val="C8A840"/>
+              <a:srgbClr val="22CC66"/>
             </a:solidFill>
           </a:ln>
         </p:spPr>
@@ -11683,20 +11567,20 @@
       </p:sp>
       <p:sp>
         <p:nvSpPr>
-          <p:cNvPr id="15" name="Rectangle 14"/>
+          <p:cNvPr id="19" name="Rectangle 18"/>
           <p:cNvSpPr/>
           <p:nvPr/>
         </p:nvSpPr>
         <p:spPr>
           <a:xfrm>
-            <a:off x="3153344" y="968368"/>
-            <a:ext cx="45000" cy="800000"/>
+            <a:off x="256032" y="3518368"/>
+            <a:ext cx="45000" cy="1210000"/>
           </a:xfrm>
           <a:prstGeom prst="rect">
             <a:avLst/>
           </a:prstGeom>
           <a:solidFill>
-            <a:srgbClr val="C8A840"/>
+            <a:srgbClr val="22CC66"/>
           </a:solidFill>
           <a:ln>
             <a:noFill/>
@@ -11726,14 +11610,14 @@
       </p:sp>
       <p:sp>
         <p:nvSpPr>
-          <p:cNvPr id="16" name="TextBox 15"/>
-          <p:cNvSpPr txBox="1"/>
-          <p:nvPr/>
-        </p:nvSpPr>
-        <p:spPr>
-          <a:xfrm>
-            <a:off x="3223344" y="1018368"/>
-            <a:ext cx="2757312" cy="330000"/>
+          <p:cNvPr id="20" name="TextBox 19"/>
+          <p:cNvSpPr txBox="1"/>
+          <p:nvPr/>
+        </p:nvSpPr>
+        <p:spPr>
+          <a:xfrm>
+            <a:off x="336032" y="3568368"/>
+            <a:ext cx="4014800" cy="260000"/>
           </a:xfrm>
           <a:prstGeom prst="rect">
             <a:avLst/>
@@ -11746,29 +11630,29 @@
           </a:bodyPr>
           <a:lstStyle/>
           <a:p>
-            <a:pPr algn="ctr"/>
-            <a:r>
-              <a:rPr sz="1200" b="1">
-                <a:solidFill>
-                  <a:srgbClr val="C8A840"/>
-                </a:solidFill>
-                <a:latin typeface="游明朝"/>
-              </a:rPr>
-              <a:t>ジョーカー</a:t>
-            </a:r>
-          </a:p>
-        </p:txBody>
-      </p:sp>
-      <p:sp>
-        <p:nvSpPr>
-          <p:cNvPr id="17" name="TextBox 16"/>
-          <p:cNvSpPr txBox="1"/>
-          <p:nvPr/>
-        </p:nvSpPr>
-        <p:spPr>
-          <a:xfrm>
-            <a:off x="3223344" y="1358368"/>
-            <a:ext cx="2757312" cy="340000"/>
+            <a:pPr algn="l"/>
+            <a:r>
+              <a:rPr sz="900" b="1">
+                <a:solidFill>
+                  <a:srgbClr val="22CC66"/>
+                </a:solidFill>
+                <a:latin typeface="メイリオ"/>
+              </a:rPr>
+              <a:t>二段階の相乗効果</a:t>
+            </a:r>
+          </a:p>
+        </p:txBody>
+      </p:sp>
+      <p:sp>
+        <p:nvSpPr>
+          <p:cNvPr id="21" name="TextBox 20"/>
+          <p:cNvSpPr txBox="1"/>
+          <p:nvPr/>
+        </p:nvSpPr>
+        <p:spPr>
+          <a:xfrm>
+            <a:off x="336032" y="3818368"/>
+            <a:ext cx="4014800" cy="800000"/>
           </a:xfrm>
           <a:prstGeom prst="rect">
             <a:avLst/>
@@ -11781,41 +11665,40 @@
           </a:bodyPr>
           <a:lstStyle/>
           <a:p>
-            <a:pPr algn="ctr"/>
-            <a:r>
-              <a:rPr sz="1000" b="1">
-                <a:solidFill>
-                  <a:srgbClr val="FFBB44"/>
+            <a:pPr algn="l"/>
+            <a:r>
+              <a:rPr sz="800" b="0">
+                <a:solidFill>
+                  <a:srgbClr val="E8ECFF"/>
                 </a:solidFill>
                 <a:latin typeface="メイリオ"/>
               </a:rPr>
-              <a:t>設定5以上
-確定</a:t>
-            </a:r>
-          </a:p>
-        </p:txBody>
-      </p:sp>
-      <p:sp>
-        <p:nvSpPr>
-          <p:cNvPr id="18" name="Rectangle 17"/>
+              <a:t>第1天井で短期保険、第2天井で長期保険。
+「次の天井まで」という投資計画が立てやすく
+プレイヤーのリスク管理を支援する設計。</a:t>
+            </a:r>
+          </a:p>
+        </p:txBody>
+      </p:sp>
+      <p:sp>
+        <p:nvSpPr>
+          <p:cNvPr id="22" name="Rectangle 21"/>
           <p:cNvSpPr/>
           <p:nvPr/>
         </p:nvSpPr>
         <p:spPr>
           <a:xfrm>
-            <a:off x="6030656" y="968368"/>
-            <a:ext cx="2842312" cy="800000"/>
+            <a:off x="4572000" y="658368"/>
+            <a:ext cx="4297680" cy="280000"/>
           </a:xfrm>
           <a:prstGeom prst="rect">
             <a:avLst/>
           </a:prstGeom>
           <a:solidFill>
-            <a:srgbClr val="0C122C"/>
+            <a:srgbClr val="141C3C"/>
           </a:solidFill>
-          <a:ln w="25400">
-            <a:solidFill>
-              <a:srgbClr val="FFBB44"/>
-            </a:solidFill>
+          <a:ln>
+            <a:noFill/>
           </a:ln>
         </p:spPr>
         <p:style>
@@ -11842,23 +11725,60 @@
       </p:sp>
       <p:sp>
         <p:nvSpPr>
-          <p:cNvPr id="19" name="Rectangle 18"/>
+          <p:cNvPr id="23" name="TextBox 22"/>
+          <p:cNvSpPr txBox="1"/>
+          <p:nvPr/>
+        </p:nvSpPr>
+        <p:spPr>
+          <a:xfrm>
+            <a:off x="4622000" y="703368"/>
+            <a:ext cx="4227680" cy="210000"/>
+          </a:xfrm>
+          <a:prstGeom prst="rect">
+            <a:avLst/>
+          </a:prstGeom>
+          <a:noFill/>
+        </p:spPr>
+        <p:txBody>
+          <a:bodyPr wrap="square">
+            <a:spAutoFit/>
+          </a:bodyPr>
+          <a:lstStyle/>
+          <a:p>
+            <a:pPr algn="l"/>
+            <a:r>
+              <a:rPr sz="1100" b="1">
+                <a:solidFill>
+                  <a:srgbClr val="FFBB44"/>
+                </a:solidFill>
+                <a:latin typeface="游明朝"/>
+              </a:rPr>
+              <a:t>天井狙い：立ち回り別の目安</a:t>
+            </a:r>
+          </a:p>
+        </p:txBody>
+      </p:sp>
+      <p:sp>
+        <p:nvSpPr>
+          <p:cNvPr id="24" name="Rectangle 23"/>
           <p:cNvSpPr/>
           <p:nvPr/>
         </p:nvSpPr>
         <p:spPr>
           <a:xfrm>
-            <a:off x="6030656" y="968368"/>
-            <a:ext cx="45000" cy="800000"/>
+            <a:off x="4572000" y="938368"/>
+            <a:ext cx="4297680" cy="1270000"/>
           </a:xfrm>
           <a:prstGeom prst="rect">
             <a:avLst/>
           </a:prstGeom>
           <a:solidFill>
-            <a:srgbClr val="FFBB44"/>
+            <a:srgbClr val="0C122C"/>
           </a:solidFill>
-          <a:ln>
-            <a:noFill/>
+          <a:ln w="15240">
+            <a:solidFill>
+              <a:srgbClr val="DD5500"/>
+            </a:solidFill>
           </a:ln>
         </p:spPr>
         <p:style>
@@ -11885,86 +11805,14 @@
       </p:sp>
       <p:sp>
         <p:nvSpPr>
-          <p:cNvPr id="20" name="TextBox 19"/>
-          <p:cNvSpPr txBox="1"/>
-          <p:nvPr/>
-        </p:nvSpPr>
-        <p:spPr>
-          <a:xfrm>
-            <a:off x="6100656" y="1018368"/>
-            <a:ext cx="2757312" cy="330000"/>
-          </a:xfrm>
-          <a:prstGeom prst="rect">
-            <a:avLst/>
-          </a:prstGeom>
-          <a:noFill/>
-        </p:spPr>
-        <p:txBody>
-          <a:bodyPr wrap="square">
-            <a:spAutoFit/>
-          </a:bodyPr>
-          <a:lstStyle/>
-          <a:p>
-            <a:pPr algn="ctr"/>
-            <a:r>
-              <a:rPr sz="1200" b="1">
-                <a:solidFill>
-                  <a:srgbClr val="FFBB44"/>
-                </a:solidFill>
-                <a:latin typeface="游明朝"/>
-              </a:rPr>
-              <a:t>シンラ
-（死ノ圧）</a:t>
-            </a:r>
-          </a:p>
-        </p:txBody>
-      </p:sp>
-      <p:sp>
-        <p:nvSpPr>
-          <p:cNvPr id="21" name="TextBox 20"/>
-          <p:cNvSpPr txBox="1"/>
-          <p:nvPr/>
-        </p:nvSpPr>
-        <p:spPr>
-          <a:xfrm>
-            <a:off x="6100656" y="1358368"/>
-            <a:ext cx="2757312" cy="340000"/>
-          </a:xfrm>
-          <a:prstGeom prst="rect">
-            <a:avLst/>
-          </a:prstGeom>
-          <a:noFill/>
-        </p:spPr>
-        <p:txBody>
-          <a:bodyPr wrap="square">
-            <a:spAutoFit/>
-          </a:bodyPr>
-          <a:lstStyle/>
-          <a:p>
-            <a:pPr algn="ctr"/>
-            <a:r>
-              <a:rPr sz="1000" b="1">
-                <a:solidFill>
-                  <a:srgbClr val="FFBB44"/>
-                </a:solidFill>
-                <a:latin typeface="メイリオ"/>
-              </a:rPr>
-              <a:t>設定6
-確定</a:t>
-            </a:r>
-          </a:p>
-        </p:txBody>
-      </p:sp>
-      <p:sp>
-        <p:nvSpPr>
-          <p:cNvPr id="22" name="Rectangle 21"/>
+          <p:cNvPr id="25" name="Rectangle 24"/>
           <p:cNvSpPr/>
           <p:nvPr/>
         </p:nvSpPr>
         <p:spPr>
           <a:xfrm>
-            <a:off x="276032" y="1828368"/>
-            <a:ext cx="2842312" cy="330000"/>
+            <a:off x="4572000" y="938368"/>
+            <a:ext cx="40000" cy="1270000"/>
           </a:xfrm>
           <a:prstGeom prst="rect">
             <a:avLst/>
@@ -12000,49 +11848,120 @@
       </p:sp>
       <p:sp>
         <p:nvSpPr>
-          <p:cNvPr id="23" name="TextBox 22"/>
-          <p:cNvSpPr txBox="1"/>
-          <p:nvPr/>
-        </p:nvSpPr>
-        <p:spPr>
-          <a:xfrm>
-            <a:off x="306032" y="1878368"/>
-            <a:ext cx="2797312" cy="250000"/>
-          </a:xfrm>
-          <a:prstGeom prst="rect">
-            <a:avLst/>
-          </a:prstGeom>
-          <a:noFill/>
-        </p:spPr>
-        <p:txBody>
-          <a:bodyPr wrap="none">
-            <a:spAutoFit/>
-          </a:bodyPr>
-          <a:lstStyle/>
-          <a:p>
-            <a:pPr algn="ctr"/>
+          <p:cNvPr id="26" name="TextBox 25"/>
+          <p:cNvSpPr txBox="1"/>
+          <p:nvPr/>
+        </p:nvSpPr>
+        <p:spPr>
+          <a:xfrm>
+            <a:off x="4642000" y="978368"/>
+            <a:ext cx="4207680" cy="240000"/>
+          </a:xfrm>
+          <a:prstGeom prst="rect">
+            <a:avLst/>
+          </a:prstGeom>
+          <a:noFill/>
+        </p:spPr>
+        <p:txBody>
+          <a:bodyPr wrap="square">
+            <a:spAutoFit/>
+          </a:bodyPr>
+          <a:lstStyle/>
+          <a:p>
+            <a:pPr algn="l"/>
             <a:r>
               <a:rPr sz="900" b="1">
                 <a:solidFill>
-                  <a:srgbClr val="05091E"/>
+                  <a:srgbClr val="DD5500"/>
                 </a:solidFill>
                 <a:latin typeface="メイリオ"/>
               </a:rPr>
-              <a:t>炎炎激闘の初当たり率</a:t>
-            </a:r>
-          </a:p>
-        </p:txBody>
-      </p:sp>
-      <p:sp>
-        <p:nvSpPr>
-          <p:cNvPr id="24" name="Rectangle 23"/>
+              <a:t>天井①狙い</a:t>
+            </a:r>
+          </a:p>
+        </p:txBody>
+      </p:sp>
+      <p:sp>
+        <p:nvSpPr>
+          <p:cNvPr id="27" name="TextBox 26"/>
+          <p:cNvSpPr txBox="1"/>
+          <p:nvPr/>
+        </p:nvSpPr>
+        <p:spPr>
+          <a:xfrm>
+            <a:off x="4642000" y="1208368"/>
+            <a:ext cx="4207680" cy="220000"/>
+          </a:xfrm>
+          <a:prstGeom prst="rect">
+            <a:avLst/>
+          </a:prstGeom>
+          <a:noFill/>
+        </p:spPr>
+        <p:txBody>
+          <a:bodyPr wrap="square">
+            <a:spAutoFit/>
+          </a:bodyPr>
+          <a:lstStyle/>
+          <a:p>
+            <a:pPr algn="l"/>
+            <a:r>
+              <a:rPr sz="800" b="0">
+                <a:solidFill>
+                  <a:srgbClr val="8888AA"/>
+                </a:solidFill>
+                <a:latin typeface="メイリオ"/>
+              </a:rPr>
+              <a:t>550G〜（リセット後 400G〜）</a:t>
+            </a:r>
+          </a:p>
+        </p:txBody>
+      </p:sp>
+      <p:sp>
+        <p:nvSpPr>
+          <p:cNvPr id="28" name="TextBox 27"/>
+          <p:cNvSpPr txBox="1"/>
+          <p:nvPr/>
+        </p:nvSpPr>
+        <p:spPr>
+          <a:xfrm>
+            <a:off x="4642000" y="1428368"/>
+            <a:ext cx="4207680" cy="650000"/>
+          </a:xfrm>
+          <a:prstGeom prst="rect">
+            <a:avLst/>
+          </a:prstGeom>
+          <a:noFill/>
+        </p:spPr>
+        <p:txBody>
+          <a:bodyPr wrap="square">
+            <a:spAutoFit/>
+          </a:bodyPr>
+          <a:lstStyle/>
+          <a:p>
+            <a:pPr algn="l"/>
+            <a:r>
+              <a:rPr sz="800" b="0">
+                <a:solidFill>
+                  <a:srgbClr val="E8ECFF"/>
+                </a:solidFill>
+                <a:latin typeface="メイリオ"/>
+              </a:rPr>
+              <a:t>最もシンプルな狙い方。
+期待値が取りやすく台数も多い。</a:t>
+            </a:r>
+          </a:p>
+        </p:txBody>
+      </p:sp>
+      <p:sp>
+        <p:nvSpPr>
+          <p:cNvPr id="29" name="Rectangle 28"/>
           <p:cNvSpPr/>
           <p:nvPr/>
         </p:nvSpPr>
         <p:spPr>
           <a:xfrm>
-            <a:off x="276032" y="2158368"/>
-            <a:ext cx="2842312" cy="1060000"/>
+            <a:off x="4572000" y="2268368"/>
+            <a:ext cx="4297680" cy="1270000"/>
           </a:xfrm>
           <a:prstGeom prst="rect">
             <a:avLst/>
@@ -12050,9 +11969,9 @@
           <a:solidFill>
             <a:srgbClr val="0C122C"/>
           </a:solidFill>
-          <a:ln w="6350">
+          <a:ln w="15240">
             <a:solidFill>
-              <a:srgbClr val="DD5500"/>
+              <a:srgbClr val="2277FF"/>
             </a:solidFill>
           </a:ln>
         </p:spPr>
@@ -12080,96 +11999,23 @@
       </p:sp>
       <p:sp>
         <p:nvSpPr>
-          <p:cNvPr id="25" name="TextBox 24"/>
-          <p:cNvSpPr txBox="1"/>
-          <p:nvPr/>
-        </p:nvSpPr>
-        <p:spPr>
-          <a:xfrm>
-            <a:off x="311032" y="2213368"/>
-            <a:ext cx="2787312" cy="255000"/>
-          </a:xfrm>
-          <a:prstGeom prst="rect">
-            <a:avLst/>
-          </a:prstGeom>
-          <a:noFill/>
-        </p:spPr>
-        <p:txBody>
-          <a:bodyPr wrap="square">
-            <a:spAutoFit/>
-          </a:bodyPr>
-          <a:lstStyle/>
-          <a:p>
-            <a:pPr algn="l"/>
-            <a:r>
-              <a:rPr sz="850" b="1">
-                <a:solidFill>
-                  <a:srgbClr val="DD5500"/>
-                </a:solidFill>
-                <a:latin typeface="メイリオ"/>
-              </a:rPr>
-              <a:t>最重要の設定差</a:t>
-            </a:r>
-          </a:p>
-        </p:txBody>
-      </p:sp>
-      <p:sp>
-        <p:nvSpPr>
-          <p:cNvPr id="26" name="TextBox 25"/>
-          <p:cNvSpPr txBox="1"/>
-          <p:nvPr/>
-        </p:nvSpPr>
-        <p:spPr>
-          <a:xfrm>
-            <a:off x="311032" y="2458368"/>
-            <a:ext cx="2787312" cy="680000"/>
-          </a:xfrm>
-          <a:prstGeom prst="rect">
-            <a:avLst/>
-          </a:prstGeom>
-          <a:noFill/>
-        </p:spPr>
-        <p:txBody>
-          <a:bodyPr wrap="square">
-            <a:spAutoFit/>
-          </a:bodyPr>
-          <a:lstStyle/>
-          <a:p>
-            <a:pPr algn="l"/>
-            <a:r>
-              <a:rPr sz="800" b="0">
-                <a:solidFill>
-                  <a:srgbClr val="E8ECFF"/>
-                </a:solidFill>
-                <a:latin typeface="メイリオ"/>
-              </a:rPr>
-              <a:t>炎炎激闘の初当たり率が
-設定によって大きく異なる。</a:t>
-            </a:r>
-          </a:p>
-        </p:txBody>
-      </p:sp>
-      <p:sp>
-        <p:nvSpPr>
-          <p:cNvPr id="27" name="Rectangle 26"/>
+          <p:cNvPr id="30" name="Rectangle 29"/>
           <p:cNvSpPr/>
           <p:nvPr/>
         </p:nvSpPr>
         <p:spPr>
           <a:xfrm>
-            <a:off x="276032" y="3258368"/>
-            <a:ext cx="2842312" cy="1060000"/>
+            <a:off x="4572000" y="2268368"/>
+            <a:ext cx="40000" cy="1270000"/>
           </a:xfrm>
           <a:prstGeom prst="rect">
             <a:avLst/>
           </a:prstGeom>
           <a:solidFill>
-            <a:srgbClr val="101632"/>
+            <a:srgbClr val="2277FF"/>
           </a:solidFill>
-          <a:ln w="6350">
-            <a:solidFill>
-              <a:srgbClr val="DD5500"/>
-            </a:solidFill>
+          <a:ln>
+            <a:noFill/>
           </a:ln>
         </p:spPr>
         <p:style>
@@ -12196,14 +12042,14 @@
       </p:sp>
       <p:sp>
         <p:nvSpPr>
-          <p:cNvPr id="28" name="TextBox 27"/>
-          <p:cNvSpPr txBox="1"/>
-          <p:nvPr/>
-        </p:nvSpPr>
-        <p:spPr>
-          <a:xfrm>
-            <a:off x="311032" y="3313368"/>
-            <a:ext cx="2787312" cy="255000"/>
+          <p:cNvPr id="31" name="TextBox 30"/>
+          <p:cNvSpPr txBox="1"/>
+          <p:nvPr/>
+        </p:nvSpPr>
+        <p:spPr>
+          <a:xfrm>
+            <a:off x="4642000" y="2308368"/>
+            <a:ext cx="4207680" cy="240000"/>
           </a:xfrm>
           <a:prstGeom prst="rect">
             <a:avLst/>
@@ -12218,27 +12064,27 @@
           <a:p>
             <a:pPr algn="l"/>
             <a:r>
-              <a:rPr sz="850" b="1">
-                <a:solidFill>
-                  <a:srgbClr val="DD5500"/>
+              <a:rPr sz="900" b="1">
+                <a:solidFill>
+                  <a:srgbClr val="2277FF"/>
                 </a:solidFill>
                 <a:latin typeface="メイリオ"/>
               </a:rPr>
-              <a:t>長時間実戦で差が出る</a:t>
-            </a:r>
-          </a:p>
-        </p:txBody>
-      </p:sp>
-      <p:sp>
-        <p:nvSpPr>
-          <p:cNvPr id="29" name="TextBox 28"/>
-          <p:cNvSpPr txBox="1"/>
-          <p:nvPr/>
-        </p:nvSpPr>
-        <p:spPr>
-          <a:xfrm>
-            <a:off x="311032" y="3558368"/>
-            <a:ext cx="2787312" cy="680000"/>
+              <a:t>天井②狙い</a:t>
+            </a:r>
+          </a:p>
+        </p:txBody>
+      </p:sp>
+      <p:sp>
+        <p:nvSpPr>
+          <p:cNvPr id="32" name="TextBox 31"/>
+          <p:cNvSpPr txBox="1"/>
+          <p:nvPr/>
+        </p:nvSpPr>
+        <p:spPr>
+          <a:xfrm>
+            <a:off x="4642000" y="2538368"/>
+            <a:ext cx="4207680" cy="220000"/>
           </a:xfrm>
           <a:prstGeom prst="rect">
             <a:avLst/>
@@ -12255,26 +12101,106 @@
             <a:r>
               <a:rPr sz="800" b="0">
                 <a:solidFill>
+                  <a:srgbClr val="8888AA"/>
+                </a:solidFill>
+                <a:latin typeface="メイリオ"/>
+              </a:rPr>
+              <a:t>1,500G〜（リセット後 1,200G〜）</a:t>
+            </a:r>
+          </a:p>
+        </p:txBody>
+      </p:sp>
+      <p:sp>
+        <p:nvSpPr>
+          <p:cNvPr id="33" name="TextBox 32"/>
+          <p:cNvSpPr txBox="1"/>
+          <p:nvPr/>
+        </p:nvSpPr>
+        <p:spPr>
+          <a:xfrm>
+            <a:off x="4642000" y="2758368"/>
+            <a:ext cx="4207680" cy="650000"/>
+          </a:xfrm>
+          <a:prstGeom prst="rect">
+            <a:avLst/>
+          </a:prstGeom>
+          <a:noFill/>
+        </p:spPr>
+        <p:txBody>
+          <a:bodyPr wrap="square">
+            <a:spAutoFit/>
+          </a:bodyPr>
+          <a:lstStyle/>
+          <a:p>
+            <a:pPr algn="l"/>
+            <a:r>
+              <a:rPr sz="800" b="0">
+                <a:solidFill>
                   <a:srgbClr val="E8ECFF"/>
                 </a:solidFill>
                 <a:latin typeface="メイリオ"/>
               </a:rPr>
-              <a:t>数百G以上の実戦で
-感じられるレベルの差。</a:t>
-            </a:r>
-          </a:p>
-        </p:txBody>
-      </p:sp>
-      <p:sp>
-        <p:nvSpPr>
-          <p:cNvPr id="30" name="Rectangle 29"/>
+              <a:t>投資が大きいが発動時の出玉も大きい。
+期待収支プラスになりやすい。</a:t>
+            </a:r>
+          </a:p>
+        </p:txBody>
+      </p:sp>
+      <p:sp>
+        <p:nvSpPr>
+          <p:cNvPr id="34" name="Rectangle 33"/>
           <p:cNvSpPr/>
           <p:nvPr/>
         </p:nvSpPr>
         <p:spPr>
           <a:xfrm>
-            <a:off x="3153344" y="1828368"/>
-            <a:ext cx="2842312" cy="330000"/>
+            <a:off x="4572000" y="3598368"/>
+            <a:ext cx="4297680" cy="1270000"/>
+          </a:xfrm>
+          <a:prstGeom prst="rect">
+            <a:avLst/>
+          </a:prstGeom>
+          <a:solidFill>
+            <a:srgbClr val="0C122C"/>
+          </a:solidFill>
+          <a:ln w="15240">
+            <a:solidFill>
+              <a:srgbClr val="22CCDD"/>
+            </a:solidFill>
+          </a:ln>
+        </p:spPr>
+        <p:style>
+          <a:lnRef idx="1">
+            <a:schemeClr val="accent1"/>
+          </a:lnRef>
+          <a:fillRef idx="3">
+            <a:schemeClr val="accent1"/>
+          </a:fillRef>
+          <a:effectRef idx="2">
+            <a:schemeClr val="accent1"/>
+          </a:effectRef>
+          <a:fontRef idx="minor">
+            <a:schemeClr val="lt1"/>
+          </a:fontRef>
+        </p:style>
+        <p:txBody>
+          <a:bodyPr rtlCol="0" anchor="ctr"/>
+          <a:lstStyle/>
+          <a:p>
+            <a:pPr algn="ctr"/>
+          </a:p>
+        </p:txBody>
+      </p:sp>
+      <p:sp>
+        <p:nvSpPr>
+          <p:cNvPr id="35" name="Rectangle 34"/>
+          <p:cNvSpPr/>
+          <p:nvPr/>
+        </p:nvSpPr>
+        <p:spPr>
+          <a:xfrm>
+            <a:off x="4572000" y="3598368"/>
+            <a:ext cx="40000" cy="1270000"/>
           </a:xfrm>
           <a:prstGeom prst="rect">
             <a:avLst/>
@@ -12310,94 +12236,49 @@
       </p:sp>
       <p:sp>
         <p:nvSpPr>
-          <p:cNvPr id="31" name="TextBox 30"/>
-          <p:cNvSpPr txBox="1"/>
-          <p:nvPr/>
-        </p:nvSpPr>
-        <p:spPr>
-          <a:xfrm>
-            <a:off x="3183344" y="1878368"/>
-            <a:ext cx="2797312" cy="250000"/>
-          </a:xfrm>
-          <a:prstGeom prst="rect">
-            <a:avLst/>
-          </a:prstGeom>
-          <a:noFill/>
-        </p:spPr>
-        <p:txBody>
-          <a:bodyPr wrap="none">
-            <a:spAutoFit/>
-          </a:bodyPr>
-          <a:lstStyle/>
-          <a:p>
-            <a:pPr algn="ctr"/>
+          <p:cNvPr id="36" name="TextBox 35"/>
+          <p:cNvSpPr txBox="1"/>
+          <p:nvPr/>
+        </p:nvSpPr>
+        <p:spPr>
+          <a:xfrm>
+            <a:off x="4642000" y="3638368"/>
+            <a:ext cx="4207680" cy="240000"/>
+          </a:xfrm>
+          <a:prstGeom prst="rect">
+            <a:avLst/>
+          </a:prstGeom>
+          <a:noFill/>
+        </p:spPr>
+        <p:txBody>
+          <a:bodyPr wrap="square">
+            <a:spAutoFit/>
+          </a:bodyPr>
+          <a:lstStyle/>
+          <a:p>
+            <a:pPr algn="l"/>
             <a:r>
               <a:rPr sz="900" b="1">
                 <a:solidFill>
-                  <a:srgbClr val="05091E"/>
+                  <a:srgbClr val="22CCDD"/>
                 </a:solidFill>
                 <a:latin typeface="メイリオ"/>
               </a:rPr>
-              <a:t>伝導者の罠 成功率</a:t>
-            </a:r>
-          </a:p>
-        </p:txBody>
-      </p:sp>
-      <p:sp>
-        <p:nvSpPr>
-          <p:cNvPr id="32" name="Rectangle 31"/>
-          <p:cNvSpPr/>
-          <p:nvPr/>
-        </p:nvSpPr>
-        <p:spPr>
-          <a:xfrm>
-            <a:off x="3153344" y="2158368"/>
-            <a:ext cx="2842312" cy="1060000"/>
-          </a:xfrm>
-          <a:prstGeom prst="rect">
-            <a:avLst/>
-          </a:prstGeom>
-          <a:solidFill>
-            <a:srgbClr val="0C122C"/>
-          </a:solidFill>
-          <a:ln w="6350">
-            <a:solidFill>
-              <a:srgbClr val="22CCDD"/>
-            </a:solidFill>
-          </a:ln>
-        </p:spPr>
-        <p:style>
-          <a:lnRef idx="1">
-            <a:schemeClr val="accent1"/>
-          </a:lnRef>
-          <a:fillRef idx="3">
-            <a:schemeClr val="accent1"/>
-          </a:fillRef>
-          <a:effectRef idx="2">
-            <a:schemeClr val="accent1"/>
-          </a:effectRef>
-          <a:fontRef idx="minor">
-            <a:schemeClr val="lt1"/>
-          </a:fontRef>
-        </p:style>
-        <p:txBody>
-          <a:bodyPr rtlCol="0" anchor="ctr"/>
-          <a:lstStyle/>
-          <a:p>
-            <a:pPr algn="ctr"/>
-          </a:p>
-        </p:txBody>
-      </p:sp>
-      <p:sp>
-        <p:nvSpPr>
-          <p:cNvPr id="33" name="TextBox 32"/>
-          <p:cNvSpPr txBox="1"/>
-          <p:nvPr/>
-        </p:nvSpPr>
-        <p:spPr>
-          <a:xfrm>
-            <a:off x="3188344" y="2213368"/>
-            <a:ext cx="2787312" cy="255000"/>
+              <a:t>両天井複合</a:t>
+            </a:r>
+          </a:p>
+        </p:txBody>
+      </p:sp>
+      <p:sp>
+        <p:nvSpPr>
+          <p:cNvPr id="37" name="TextBox 36"/>
+          <p:cNvSpPr txBox="1"/>
+          <p:nvPr/>
+        </p:nvSpPr>
+        <p:spPr>
+          <a:xfrm>
+            <a:off x="4642000" y="3868368"/>
+            <a:ext cx="4207680" cy="220000"/>
           </a:xfrm>
           <a:prstGeom prst="rect">
             <a:avLst/>
@@ -12412,27 +12293,27 @@
           <a:p>
             <a:pPr algn="l"/>
             <a:r>
-              <a:rPr sz="850" b="1">
-                <a:solidFill>
-                  <a:srgbClr val="22CCDD"/>
+              <a:rPr sz="800" b="0">
+                <a:solidFill>
+                  <a:srgbClr val="8888AA"/>
                 </a:solidFill>
                 <a:latin typeface="メイリオ"/>
               </a:rPr>
-              <a:t>成功期待度約40%（全体）</a:t>
-            </a:r>
-          </a:p>
-        </p:txBody>
-      </p:sp>
-      <p:sp>
-        <p:nvSpPr>
-          <p:cNvPr id="34" name="TextBox 33"/>
-          <p:cNvSpPr txBox="1"/>
-          <p:nvPr/>
-        </p:nvSpPr>
-        <p:spPr>
-          <a:xfrm>
-            <a:off x="3188344" y="2458368"/>
-            <a:ext cx="2787312" cy="680000"/>
+              <a:t>状況に応じた判断が必要</a:t>
+            </a:r>
+          </a:p>
+        </p:txBody>
+      </p:sp>
+      <p:sp>
+        <p:nvSpPr>
+          <p:cNvPr id="38" name="TextBox 37"/>
+          <p:cNvSpPr txBox="1"/>
+          <p:nvPr/>
+        </p:nvSpPr>
+        <p:spPr>
+          <a:xfrm>
+            <a:off x="4642000" y="4088368"/>
+            <a:ext cx="4207680" cy="650000"/>
           </a:xfrm>
           <a:prstGeom prst="rect">
             <a:avLst/>
@@ -12453,441 +12334,15 @@
                 </a:solidFill>
                 <a:latin typeface="メイリオ"/>
               </a:rPr>
-              <a:t>高設定ほど成功率が高い。
-通過回数を記録して判断。</a:t>
-            </a:r>
-          </a:p>
-        </p:txBody>
-      </p:sp>
-      <p:sp>
-        <p:nvSpPr>
-          <p:cNvPr id="35" name="Rectangle 34"/>
-          <p:cNvSpPr/>
-          <p:nvPr/>
-        </p:nvSpPr>
-        <p:spPr>
-          <a:xfrm>
-            <a:off x="3153344" y="3258368"/>
-            <a:ext cx="2842312" cy="1060000"/>
-          </a:xfrm>
-          <a:prstGeom prst="rect">
-            <a:avLst/>
-          </a:prstGeom>
-          <a:solidFill>
-            <a:srgbClr val="101632"/>
-          </a:solidFill>
-          <a:ln w="6350">
-            <a:solidFill>
-              <a:srgbClr val="22CCDD"/>
-            </a:solidFill>
-          </a:ln>
-        </p:spPr>
-        <p:style>
-          <a:lnRef idx="1">
-            <a:schemeClr val="accent1"/>
-          </a:lnRef>
-          <a:fillRef idx="3">
-            <a:schemeClr val="accent1"/>
-          </a:fillRef>
-          <a:effectRef idx="2">
-            <a:schemeClr val="accent1"/>
-          </a:effectRef>
-          <a:fontRef idx="minor">
-            <a:schemeClr val="lt1"/>
-          </a:fontRef>
-        </p:style>
-        <p:txBody>
-          <a:bodyPr rtlCol="0" anchor="ctr"/>
-          <a:lstStyle/>
-          <a:p>
-            <a:pPr algn="ctr"/>
-          </a:p>
-        </p:txBody>
-      </p:sp>
-      <p:sp>
-        <p:nvSpPr>
-          <p:cNvPr id="36" name="TextBox 35"/>
-          <p:cNvSpPr txBox="1"/>
-          <p:nvPr/>
-        </p:nvSpPr>
-        <p:spPr>
-          <a:xfrm>
-            <a:off x="3188344" y="3313368"/>
-            <a:ext cx="2787312" cy="255000"/>
-          </a:xfrm>
-          <a:prstGeom prst="rect">
-            <a:avLst/>
-          </a:prstGeom>
-          <a:noFill/>
-        </p:spPr>
-        <p:txBody>
-          <a:bodyPr wrap="square">
-            <a:spAutoFit/>
-          </a:bodyPr>
-          <a:lstStyle/>
-          <a:p>
-            <a:pPr algn="l"/>
-            <a:r>
-              <a:rPr sz="850" b="1">
-                <a:solidFill>
-                  <a:srgbClr val="22CCDD"/>
-                </a:solidFill>
-                <a:latin typeface="メイリオ"/>
-              </a:rPr>
-              <a:t>十字目変換率にも差</a:t>
-            </a:r>
-          </a:p>
-        </p:txBody>
-      </p:sp>
-      <p:sp>
-        <p:nvSpPr>
-          <p:cNvPr id="37" name="TextBox 36"/>
-          <p:cNvSpPr txBox="1"/>
-          <p:nvPr/>
-        </p:nvSpPr>
-        <p:spPr>
-          <a:xfrm>
-            <a:off x="3188344" y="3558368"/>
-            <a:ext cx="2787312" cy="680000"/>
-          </a:xfrm>
-          <a:prstGeom prst="rect">
-            <a:avLst/>
-          </a:prstGeom>
-          <a:noFill/>
-        </p:spPr>
-        <p:txBody>
-          <a:bodyPr wrap="square">
-            <a:spAutoFit/>
-          </a:bodyPr>
-          <a:lstStyle/>
-          <a:p>
-            <a:pPr algn="l"/>
-            <a:r>
-              <a:rPr sz="800" b="0">
-                <a:solidFill>
-                  <a:srgbClr val="E8ECFF"/>
-                </a:solidFill>
-                <a:latin typeface="メイリオ"/>
-              </a:rPr>
-              <a:t>ボーナス契機となる
-十字目変換率も高設定優遇。</a:t>
-            </a:r>
-          </a:p>
-        </p:txBody>
-      </p:sp>
-      <p:sp>
-        <p:nvSpPr>
-          <p:cNvPr id="38" name="Rectangle 37"/>
-          <p:cNvSpPr/>
-          <p:nvPr/>
-        </p:nvSpPr>
-        <p:spPr>
-          <a:xfrm>
-            <a:off x="6030656" y="1828368"/>
-            <a:ext cx="2842312" cy="330000"/>
-          </a:xfrm>
-          <a:prstGeom prst="rect">
-            <a:avLst/>
-          </a:prstGeom>
-          <a:solidFill>
-            <a:srgbClr val="2277FF"/>
-          </a:solidFill>
-          <a:ln>
-            <a:noFill/>
-          </a:ln>
-        </p:spPr>
-        <p:style>
-          <a:lnRef idx="1">
-            <a:schemeClr val="accent1"/>
-          </a:lnRef>
-          <a:fillRef idx="3">
-            <a:schemeClr val="accent1"/>
-          </a:fillRef>
-          <a:effectRef idx="2">
-            <a:schemeClr val="accent1"/>
-          </a:effectRef>
-          <a:fontRef idx="minor">
-            <a:schemeClr val="lt1"/>
-          </a:fontRef>
-        </p:style>
-        <p:txBody>
-          <a:bodyPr rtlCol="0" anchor="ctr"/>
-          <a:lstStyle/>
-          <a:p>
-            <a:pPr algn="ctr"/>
+              <a:t>天井①+②の距離を計算した
+高度な立ち回り。データ確認が必須。</a:t>
+            </a:r>
           </a:p>
         </p:txBody>
       </p:sp>
       <p:sp>
         <p:nvSpPr>
           <p:cNvPr id="39" name="TextBox 38"/>
-          <p:cNvSpPr txBox="1"/>
-          <p:nvPr/>
-        </p:nvSpPr>
-        <p:spPr>
-          <a:xfrm>
-            <a:off x="6060656" y="1878368"/>
-            <a:ext cx="2797312" cy="250000"/>
-          </a:xfrm>
-          <a:prstGeom prst="rect">
-            <a:avLst/>
-          </a:prstGeom>
-          <a:noFill/>
-        </p:spPr>
-        <p:txBody>
-          <a:bodyPr wrap="none">
-            <a:spAutoFit/>
-          </a:bodyPr>
-          <a:lstStyle/>
-          <a:p>
-            <a:pPr algn="ctr"/>
-            <a:r>
-              <a:rPr sz="900" b="1">
-                <a:solidFill>
-                  <a:srgbClr val="05091E"/>
-                </a:solidFill>
-                <a:latin typeface="メイリオ"/>
-              </a:rPr>
-              <a:t>ボーナス終了画面</a:t>
-            </a:r>
-          </a:p>
-        </p:txBody>
-      </p:sp>
-      <p:sp>
-        <p:nvSpPr>
-          <p:cNvPr id="40" name="Rectangle 39"/>
-          <p:cNvSpPr/>
-          <p:nvPr/>
-        </p:nvSpPr>
-        <p:spPr>
-          <a:xfrm>
-            <a:off x="6030656" y="2158368"/>
-            <a:ext cx="2842312" cy="1060000"/>
-          </a:xfrm>
-          <a:prstGeom prst="rect">
-            <a:avLst/>
-          </a:prstGeom>
-          <a:solidFill>
-            <a:srgbClr val="0C122C"/>
-          </a:solidFill>
-          <a:ln w="6350">
-            <a:solidFill>
-              <a:srgbClr val="2277FF"/>
-            </a:solidFill>
-          </a:ln>
-        </p:spPr>
-        <p:style>
-          <a:lnRef idx="1">
-            <a:schemeClr val="accent1"/>
-          </a:lnRef>
-          <a:fillRef idx="3">
-            <a:schemeClr val="accent1"/>
-          </a:fillRef>
-          <a:effectRef idx="2">
-            <a:schemeClr val="accent1"/>
-          </a:effectRef>
-          <a:fontRef idx="minor">
-            <a:schemeClr val="lt1"/>
-          </a:fontRef>
-        </p:style>
-        <p:txBody>
-          <a:bodyPr rtlCol="0" anchor="ctr"/>
-          <a:lstStyle/>
-          <a:p>
-            <a:pPr algn="ctr"/>
-          </a:p>
-        </p:txBody>
-      </p:sp>
-      <p:sp>
-        <p:nvSpPr>
-          <p:cNvPr id="41" name="TextBox 40"/>
-          <p:cNvSpPr txBox="1"/>
-          <p:nvPr/>
-        </p:nvSpPr>
-        <p:spPr>
-          <a:xfrm>
-            <a:off x="6065656" y="2213368"/>
-            <a:ext cx="2787312" cy="255000"/>
-          </a:xfrm>
-          <a:prstGeom prst="rect">
-            <a:avLst/>
-          </a:prstGeom>
-          <a:noFill/>
-        </p:spPr>
-        <p:txBody>
-          <a:bodyPr wrap="square">
-            <a:spAutoFit/>
-          </a:bodyPr>
-          <a:lstStyle/>
-          <a:p>
-            <a:pPr algn="l"/>
-            <a:r>
-              <a:rPr sz="850" b="1">
-                <a:solidFill>
-                  <a:srgbClr val="2277FF"/>
-                </a:solidFill>
-                <a:latin typeface="メイリオ"/>
-              </a:rPr>
-              <a:t>各ボーナス後に示唆</a:t>
-            </a:r>
-          </a:p>
-        </p:txBody>
-      </p:sp>
-      <p:sp>
-        <p:nvSpPr>
-          <p:cNvPr id="42" name="TextBox 41"/>
-          <p:cNvSpPr txBox="1"/>
-          <p:nvPr/>
-        </p:nvSpPr>
-        <p:spPr>
-          <a:xfrm>
-            <a:off x="6065656" y="2458368"/>
-            <a:ext cx="2787312" cy="680000"/>
-          </a:xfrm>
-          <a:prstGeom prst="rect">
-            <a:avLst/>
-          </a:prstGeom>
-          <a:noFill/>
-        </p:spPr>
-        <p:txBody>
-          <a:bodyPr wrap="square">
-            <a:spAutoFit/>
-          </a:bodyPr>
-          <a:lstStyle/>
-          <a:p>
-            <a:pPr algn="l"/>
-            <a:r>
-              <a:rPr sz="800" b="0">
-                <a:solidFill>
-                  <a:srgbClr val="E8ECFF"/>
-                </a:solidFill>
-                <a:latin typeface="メイリオ"/>
-              </a:rPr>
-              <a:t>ボーナス終了後の
-画面に設定示唆あり。</a:t>
-            </a:r>
-          </a:p>
-        </p:txBody>
-      </p:sp>
-      <p:sp>
-        <p:nvSpPr>
-          <p:cNvPr id="43" name="Rectangle 42"/>
-          <p:cNvSpPr/>
-          <p:nvPr/>
-        </p:nvSpPr>
-        <p:spPr>
-          <a:xfrm>
-            <a:off x="6030656" y="3258368"/>
-            <a:ext cx="2842312" cy="1060000"/>
-          </a:xfrm>
-          <a:prstGeom prst="rect">
-            <a:avLst/>
-          </a:prstGeom>
-          <a:solidFill>
-            <a:srgbClr val="101632"/>
-          </a:solidFill>
-          <a:ln w="6350">
-            <a:solidFill>
-              <a:srgbClr val="2277FF"/>
-            </a:solidFill>
-          </a:ln>
-        </p:spPr>
-        <p:style>
-          <a:lnRef idx="1">
-            <a:schemeClr val="accent1"/>
-          </a:lnRef>
-          <a:fillRef idx="3">
-            <a:schemeClr val="accent1"/>
-          </a:fillRef>
-          <a:effectRef idx="2">
-            <a:schemeClr val="accent1"/>
-          </a:effectRef>
-          <a:fontRef idx="minor">
-            <a:schemeClr val="lt1"/>
-          </a:fontRef>
-        </p:style>
-        <p:txBody>
-          <a:bodyPr rtlCol="0" anchor="ctr"/>
-          <a:lstStyle/>
-          <a:p>
-            <a:pPr algn="ctr"/>
-          </a:p>
-        </p:txBody>
-      </p:sp>
-      <p:sp>
-        <p:nvSpPr>
-          <p:cNvPr id="44" name="TextBox 43"/>
-          <p:cNvSpPr txBox="1"/>
-          <p:nvPr/>
-        </p:nvSpPr>
-        <p:spPr>
-          <a:xfrm>
-            <a:off x="6065656" y="3313368"/>
-            <a:ext cx="2787312" cy="255000"/>
-          </a:xfrm>
-          <a:prstGeom prst="rect">
-            <a:avLst/>
-          </a:prstGeom>
-          <a:noFill/>
-        </p:spPr>
-        <p:txBody>
-          <a:bodyPr wrap="square">
-            <a:spAutoFit/>
-          </a:bodyPr>
-          <a:lstStyle/>
-          <a:p>
-            <a:pPr algn="l"/>
-            <a:r>
-              <a:rPr sz="850" b="1">
-                <a:solidFill>
-                  <a:srgbClr val="2277FF"/>
-                </a:solidFill>
-                <a:latin typeface="メイリオ"/>
-              </a:rPr>
-              <a:t>複数回確認で精度UP</a:t>
-            </a:r>
-          </a:p>
-        </p:txBody>
-      </p:sp>
-      <p:sp>
-        <p:nvSpPr>
-          <p:cNvPr id="45" name="TextBox 44"/>
-          <p:cNvSpPr txBox="1"/>
-          <p:nvPr/>
-        </p:nvSpPr>
-        <p:spPr>
-          <a:xfrm>
-            <a:off x="6065656" y="3558368"/>
-            <a:ext cx="2787312" cy="680000"/>
-          </a:xfrm>
-          <a:prstGeom prst="rect">
-            <a:avLst/>
-          </a:prstGeom>
-          <a:noFill/>
-        </p:spPr>
-        <p:txBody>
-          <a:bodyPr wrap="square">
-            <a:spAutoFit/>
-          </a:bodyPr>
-          <a:lstStyle/>
-          <a:p>
-            <a:pPr algn="l"/>
-            <a:r>
-              <a:rPr sz="800" b="0">
-                <a:solidFill>
-                  <a:srgbClr val="E8ECFF"/>
-                </a:solidFill>
-                <a:latin typeface="メイリオ"/>
-              </a:rPr>
-              <a:t>単発では判断難しいため
-複数回のデータを積む。</a:t>
-            </a:r>
-          </a:p>
-        </p:txBody>
-      </p:sp>
-      <p:sp>
-        <p:nvSpPr>
-          <p:cNvPr id="46" name="TextBox 45"/>
           <p:cNvSpPr txBox="1"/>
           <p:nvPr/>
         </p:nvSpPr>
@@ -13078,7 +12533,7 @@
                 </a:solidFill>
                 <a:latin typeface="游明朝"/>
               </a:rPr>
-              <a:t>まとめ ── 設計から学べること</a:t>
+              <a:t>設定判別 ── REGボーナスのキャラシナリオが最重要</a:t>
             </a:r>
           </a:p>
         </p:txBody>
@@ -13113,7 +12568,1769 @@
                 </a:solidFill>
                 <a:latin typeface="メイリオ"/>
               </a:rPr>
-              <a:t>7/7</a:t>
+              <a:t>7/8</a:t>
+            </a:r>
+          </a:p>
+        </p:txBody>
+      </p:sp>
+      <p:sp>
+        <p:nvSpPr>
+          <p:cNvPr id="7" name="Rectangle 6"/>
+          <p:cNvSpPr/>
+          <p:nvPr/>
+        </p:nvSpPr>
+        <p:spPr>
+          <a:xfrm>
+            <a:off x="0" y="530352"/>
+            <a:ext cx="9144000" cy="7000"/>
+          </a:xfrm>
+          <a:prstGeom prst="rect">
+            <a:avLst/>
+          </a:prstGeom>
+          <a:solidFill>
+            <a:srgbClr val="DD5500"/>
+          </a:solidFill>
+          <a:ln>
+            <a:noFill/>
+          </a:ln>
+        </p:spPr>
+        <p:style>
+          <a:lnRef idx="1">
+            <a:schemeClr val="accent1"/>
+          </a:lnRef>
+          <a:fillRef idx="3">
+            <a:schemeClr val="accent1"/>
+          </a:fillRef>
+          <a:effectRef idx="2">
+            <a:schemeClr val="accent1"/>
+          </a:effectRef>
+          <a:fontRef idx="minor">
+            <a:schemeClr val="lt1"/>
+          </a:fontRef>
+        </p:style>
+        <p:txBody>
+          <a:bodyPr rtlCol="0" anchor="ctr"/>
+          <a:lstStyle/>
+          <a:p>
+            <a:pPr algn="ctr"/>
+          </a:p>
+        </p:txBody>
+      </p:sp>
+      <p:sp>
+        <p:nvSpPr>
+          <p:cNvPr id="8" name="Rectangle 7"/>
+          <p:cNvSpPr/>
+          <p:nvPr/>
+        </p:nvSpPr>
+        <p:spPr>
+          <a:xfrm>
+            <a:off x="256032" y="658368"/>
+            <a:ext cx="8631936" cy="310000"/>
+          </a:xfrm>
+          <a:prstGeom prst="rect">
+            <a:avLst/>
+          </a:prstGeom>
+          <a:solidFill>
+            <a:srgbClr val="DD5500"/>
+          </a:solidFill>
+          <a:ln>
+            <a:noFill/>
+          </a:ln>
+        </p:spPr>
+        <p:style>
+          <a:lnRef idx="1">
+            <a:schemeClr val="accent1"/>
+          </a:lnRef>
+          <a:fillRef idx="3">
+            <a:schemeClr val="accent1"/>
+          </a:fillRef>
+          <a:effectRef idx="2">
+            <a:schemeClr val="accent1"/>
+          </a:effectRef>
+          <a:fontRef idx="minor">
+            <a:schemeClr val="lt1"/>
+          </a:fontRef>
+        </p:style>
+        <p:txBody>
+          <a:bodyPr rtlCol="0" anchor="ctr"/>
+          <a:lstStyle/>
+          <a:p>
+            <a:pPr algn="ctr"/>
+          </a:p>
+        </p:txBody>
+      </p:sp>
+      <p:sp>
+        <p:nvSpPr>
+          <p:cNvPr id="9" name="TextBox 8"/>
+          <p:cNvSpPr txBox="1"/>
+          <p:nvPr/>
+        </p:nvSpPr>
+        <p:spPr>
+          <a:xfrm>
+            <a:off x="306032" y="708368"/>
+            <a:ext cx="8561936" cy="240000"/>
+          </a:xfrm>
+          <a:prstGeom prst="rect">
+            <a:avLst/>
+          </a:prstGeom>
+          <a:noFill/>
+        </p:spPr>
+        <p:txBody>
+          <a:bodyPr wrap="square">
+            <a:spAutoFit/>
+          </a:bodyPr>
+          <a:lstStyle/>
+          <a:p>
+            <a:pPr algn="l"/>
+            <a:r>
+              <a:rPr sz="1000" b="1">
+                <a:solidFill>
+                  <a:srgbClr val="05091E"/>
+                </a:solidFill>
+                <a:latin typeface="メイリオ"/>
+              </a:rPr>
+              <a:t>REGボーナス中 ── キャラ紹介シナリオによる設定示唆（最重要）</a:t>
+            </a:r>
+          </a:p>
+        </p:txBody>
+      </p:sp>
+      <p:sp>
+        <p:nvSpPr>
+          <p:cNvPr id="10" name="Rectangle 9"/>
+          <p:cNvSpPr/>
+          <p:nvPr/>
+        </p:nvSpPr>
+        <p:spPr>
+          <a:xfrm>
+            <a:off x="276032" y="968368"/>
+            <a:ext cx="2842312" cy="800000"/>
+          </a:xfrm>
+          <a:prstGeom prst="rect">
+            <a:avLst/>
+          </a:prstGeom>
+          <a:solidFill>
+            <a:srgbClr val="0C122C"/>
+          </a:solidFill>
+          <a:ln w="25400">
+            <a:solidFill>
+              <a:srgbClr val="FF8822"/>
+            </a:solidFill>
+          </a:ln>
+        </p:spPr>
+        <p:style>
+          <a:lnRef idx="1">
+            <a:schemeClr val="accent1"/>
+          </a:lnRef>
+          <a:fillRef idx="3">
+            <a:schemeClr val="accent1"/>
+          </a:fillRef>
+          <a:effectRef idx="2">
+            <a:schemeClr val="accent1"/>
+          </a:effectRef>
+          <a:fontRef idx="minor">
+            <a:schemeClr val="lt1"/>
+          </a:fontRef>
+        </p:style>
+        <p:txBody>
+          <a:bodyPr rtlCol="0" anchor="ctr"/>
+          <a:lstStyle/>
+          <a:p>
+            <a:pPr algn="ctr"/>
+          </a:p>
+        </p:txBody>
+      </p:sp>
+      <p:sp>
+        <p:nvSpPr>
+          <p:cNvPr id="11" name="Rectangle 10"/>
+          <p:cNvSpPr/>
+          <p:nvPr/>
+        </p:nvSpPr>
+        <p:spPr>
+          <a:xfrm>
+            <a:off x="276032" y="968368"/>
+            <a:ext cx="45000" cy="800000"/>
+          </a:xfrm>
+          <a:prstGeom prst="rect">
+            <a:avLst/>
+          </a:prstGeom>
+          <a:solidFill>
+            <a:srgbClr val="FF8822"/>
+          </a:solidFill>
+          <a:ln>
+            <a:noFill/>
+          </a:ln>
+        </p:spPr>
+        <p:style>
+          <a:lnRef idx="1">
+            <a:schemeClr val="accent1"/>
+          </a:lnRef>
+          <a:fillRef idx="3">
+            <a:schemeClr val="accent1"/>
+          </a:fillRef>
+          <a:effectRef idx="2">
+            <a:schemeClr val="accent1"/>
+          </a:effectRef>
+          <a:fontRef idx="minor">
+            <a:schemeClr val="lt1"/>
+          </a:fontRef>
+        </p:style>
+        <p:txBody>
+          <a:bodyPr rtlCol="0" anchor="ctr"/>
+          <a:lstStyle/>
+          <a:p>
+            <a:pPr algn="ctr"/>
+          </a:p>
+        </p:txBody>
+      </p:sp>
+      <p:sp>
+        <p:nvSpPr>
+          <p:cNvPr id="12" name="TextBox 11"/>
+          <p:cNvSpPr txBox="1"/>
+          <p:nvPr/>
+        </p:nvSpPr>
+        <p:spPr>
+          <a:xfrm>
+            <a:off x="346032" y="1018368"/>
+            <a:ext cx="2757312" cy="330000"/>
+          </a:xfrm>
+          <a:prstGeom prst="rect">
+            <a:avLst/>
+          </a:prstGeom>
+          <a:noFill/>
+        </p:spPr>
+        <p:txBody>
+          <a:bodyPr wrap="square">
+            <a:spAutoFit/>
+          </a:bodyPr>
+          <a:lstStyle/>
+          <a:p>
+            <a:pPr algn="ctr"/>
+            <a:r>
+              <a:rPr sz="1200" b="1">
+                <a:solidFill>
+                  <a:srgbClr val="FF8822"/>
+                </a:solidFill>
+                <a:latin typeface="游明朝"/>
+              </a:rPr>
+              <a:t>黒野</a:t>
+            </a:r>
+          </a:p>
+        </p:txBody>
+      </p:sp>
+      <p:sp>
+        <p:nvSpPr>
+          <p:cNvPr id="13" name="TextBox 12"/>
+          <p:cNvSpPr txBox="1"/>
+          <p:nvPr/>
+        </p:nvSpPr>
+        <p:spPr>
+          <a:xfrm>
+            <a:off x="346032" y="1358368"/>
+            <a:ext cx="2757312" cy="340000"/>
+          </a:xfrm>
+          <a:prstGeom prst="rect">
+            <a:avLst/>
+          </a:prstGeom>
+          <a:noFill/>
+        </p:spPr>
+        <p:txBody>
+          <a:bodyPr wrap="square">
+            <a:spAutoFit/>
+          </a:bodyPr>
+          <a:lstStyle/>
+          <a:p>
+            <a:pPr algn="ctr"/>
+            <a:r>
+              <a:rPr sz="1000" b="1">
+                <a:solidFill>
+                  <a:srgbClr val="FFBB44"/>
+                </a:solidFill>
+                <a:latin typeface="メイリオ"/>
+              </a:rPr>
+              <a:t>設定4以上
+確定</a:t>
+            </a:r>
+          </a:p>
+        </p:txBody>
+      </p:sp>
+      <p:sp>
+        <p:nvSpPr>
+          <p:cNvPr id="14" name="Rectangle 13"/>
+          <p:cNvSpPr/>
+          <p:nvPr/>
+        </p:nvSpPr>
+        <p:spPr>
+          <a:xfrm>
+            <a:off x="3153344" y="968368"/>
+            <a:ext cx="2842312" cy="800000"/>
+          </a:xfrm>
+          <a:prstGeom prst="rect">
+            <a:avLst/>
+          </a:prstGeom>
+          <a:solidFill>
+            <a:srgbClr val="0C122C"/>
+          </a:solidFill>
+          <a:ln w="25400">
+            <a:solidFill>
+              <a:srgbClr val="C8A840"/>
+            </a:solidFill>
+          </a:ln>
+        </p:spPr>
+        <p:style>
+          <a:lnRef idx="1">
+            <a:schemeClr val="accent1"/>
+          </a:lnRef>
+          <a:fillRef idx="3">
+            <a:schemeClr val="accent1"/>
+          </a:fillRef>
+          <a:effectRef idx="2">
+            <a:schemeClr val="accent1"/>
+          </a:effectRef>
+          <a:fontRef idx="minor">
+            <a:schemeClr val="lt1"/>
+          </a:fontRef>
+        </p:style>
+        <p:txBody>
+          <a:bodyPr rtlCol="0" anchor="ctr"/>
+          <a:lstStyle/>
+          <a:p>
+            <a:pPr algn="ctr"/>
+          </a:p>
+        </p:txBody>
+      </p:sp>
+      <p:sp>
+        <p:nvSpPr>
+          <p:cNvPr id="15" name="Rectangle 14"/>
+          <p:cNvSpPr/>
+          <p:nvPr/>
+        </p:nvSpPr>
+        <p:spPr>
+          <a:xfrm>
+            <a:off x="3153344" y="968368"/>
+            <a:ext cx="45000" cy="800000"/>
+          </a:xfrm>
+          <a:prstGeom prst="rect">
+            <a:avLst/>
+          </a:prstGeom>
+          <a:solidFill>
+            <a:srgbClr val="C8A840"/>
+          </a:solidFill>
+          <a:ln>
+            <a:noFill/>
+          </a:ln>
+        </p:spPr>
+        <p:style>
+          <a:lnRef idx="1">
+            <a:schemeClr val="accent1"/>
+          </a:lnRef>
+          <a:fillRef idx="3">
+            <a:schemeClr val="accent1"/>
+          </a:fillRef>
+          <a:effectRef idx="2">
+            <a:schemeClr val="accent1"/>
+          </a:effectRef>
+          <a:fontRef idx="minor">
+            <a:schemeClr val="lt1"/>
+          </a:fontRef>
+        </p:style>
+        <p:txBody>
+          <a:bodyPr rtlCol="0" anchor="ctr"/>
+          <a:lstStyle/>
+          <a:p>
+            <a:pPr algn="ctr"/>
+          </a:p>
+        </p:txBody>
+      </p:sp>
+      <p:sp>
+        <p:nvSpPr>
+          <p:cNvPr id="16" name="TextBox 15"/>
+          <p:cNvSpPr txBox="1"/>
+          <p:nvPr/>
+        </p:nvSpPr>
+        <p:spPr>
+          <a:xfrm>
+            <a:off x="3223344" y="1018368"/>
+            <a:ext cx="2757312" cy="330000"/>
+          </a:xfrm>
+          <a:prstGeom prst="rect">
+            <a:avLst/>
+          </a:prstGeom>
+          <a:noFill/>
+        </p:spPr>
+        <p:txBody>
+          <a:bodyPr wrap="square">
+            <a:spAutoFit/>
+          </a:bodyPr>
+          <a:lstStyle/>
+          <a:p>
+            <a:pPr algn="ctr"/>
+            <a:r>
+              <a:rPr sz="1200" b="1">
+                <a:solidFill>
+                  <a:srgbClr val="C8A840"/>
+                </a:solidFill>
+                <a:latin typeface="游明朝"/>
+              </a:rPr>
+              <a:t>ジョーカー</a:t>
+            </a:r>
+          </a:p>
+        </p:txBody>
+      </p:sp>
+      <p:sp>
+        <p:nvSpPr>
+          <p:cNvPr id="17" name="TextBox 16"/>
+          <p:cNvSpPr txBox="1"/>
+          <p:nvPr/>
+        </p:nvSpPr>
+        <p:spPr>
+          <a:xfrm>
+            <a:off x="3223344" y="1358368"/>
+            <a:ext cx="2757312" cy="340000"/>
+          </a:xfrm>
+          <a:prstGeom prst="rect">
+            <a:avLst/>
+          </a:prstGeom>
+          <a:noFill/>
+        </p:spPr>
+        <p:txBody>
+          <a:bodyPr wrap="square">
+            <a:spAutoFit/>
+          </a:bodyPr>
+          <a:lstStyle/>
+          <a:p>
+            <a:pPr algn="ctr"/>
+            <a:r>
+              <a:rPr sz="1000" b="1">
+                <a:solidFill>
+                  <a:srgbClr val="FFBB44"/>
+                </a:solidFill>
+                <a:latin typeface="メイリオ"/>
+              </a:rPr>
+              <a:t>設定5以上
+確定</a:t>
+            </a:r>
+          </a:p>
+        </p:txBody>
+      </p:sp>
+      <p:sp>
+        <p:nvSpPr>
+          <p:cNvPr id="18" name="Rectangle 17"/>
+          <p:cNvSpPr/>
+          <p:nvPr/>
+        </p:nvSpPr>
+        <p:spPr>
+          <a:xfrm>
+            <a:off x="6030656" y="968368"/>
+            <a:ext cx="2842312" cy="800000"/>
+          </a:xfrm>
+          <a:prstGeom prst="rect">
+            <a:avLst/>
+          </a:prstGeom>
+          <a:solidFill>
+            <a:srgbClr val="0C122C"/>
+          </a:solidFill>
+          <a:ln w="25400">
+            <a:solidFill>
+              <a:srgbClr val="FFBB44"/>
+            </a:solidFill>
+          </a:ln>
+        </p:spPr>
+        <p:style>
+          <a:lnRef idx="1">
+            <a:schemeClr val="accent1"/>
+          </a:lnRef>
+          <a:fillRef idx="3">
+            <a:schemeClr val="accent1"/>
+          </a:fillRef>
+          <a:effectRef idx="2">
+            <a:schemeClr val="accent1"/>
+          </a:effectRef>
+          <a:fontRef idx="minor">
+            <a:schemeClr val="lt1"/>
+          </a:fontRef>
+        </p:style>
+        <p:txBody>
+          <a:bodyPr rtlCol="0" anchor="ctr"/>
+          <a:lstStyle/>
+          <a:p>
+            <a:pPr algn="ctr"/>
+          </a:p>
+        </p:txBody>
+      </p:sp>
+      <p:sp>
+        <p:nvSpPr>
+          <p:cNvPr id="19" name="Rectangle 18"/>
+          <p:cNvSpPr/>
+          <p:nvPr/>
+        </p:nvSpPr>
+        <p:spPr>
+          <a:xfrm>
+            <a:off x="6030656" y="968368"/>
+            <a:ext cx="45000" cy="800000"/>
+          </a:xfrm>
+          <a:prstGeom prst="rect">
+            <a:avLst/>
+          </a:prstGeom>
+          <a:solidFill>
+            <a:srgbClr val="FFBB44"/>
+          </a:solidFill>
+          <a:ln>
+            <a:noFill/>
+          </a:ln>
+        </p:spPr>
+        <p:style>
+          <a:lnRef idx="1">
+            <a:schemeClr val="accent1"/>
+          </a:lnRef>
+          <a:fillRef idx="3">
+            <a:schemeClr val="accent1"/>
+          </a:fillRef>
+          <a:effectRef idx="2">
+            <a:schemeClr val="accent1"/>
+          </a:effectRef>
+          <a:fontRef idx="minor">
+            <a:schemeClr val="lt1"/>
+          </a:fontRef>
+        </p:style>
+        <p:txBody>
+          <a:bodyPr rtlCol="0" anchor="ctr"/>
+          <a:lstStyle/>
+          <a:p>
+            <a:pPr algn="ctr"/>
+          </a:p>
+        </p:txBody>
+      </p:sp>
+      <p:sp>
+        <p:nvSpPr>
+          <p:cNvPr id="20" name="TextBox 19"/>
+          <p:cNvSpPr txBox="1"/>
+          <p:nvPr/>
+        </p:nvSpPr>
+        <p:spPr>
+          <a:xfrm>
+            <a:off x="6100656" y="1018368"/>
+            <a:ext cx="2757312" cy="330000"/>
+          </a:xfrm>
+          <a:prstGeom prst="rect">
+            <a:avLst/>
+          </a:prstGeom>
+          <a:noFill/>
+        </p:spPr>
+        <p:txBody>
+          <a:bodyPr wrap="square">
+            <a:spAutoFit/>
+          </a:bodyPr>
+          <a:lstStyle/>
+          <a:p>
+            <a:pPr algn="ctr"/>
+            <a:r>
+              <a:rPr sz="1200" b="1">
+                <a:solidFill>
+                  <a:srgbClr val="FFBB44"/>
+                </a:solidFill>
+                <a:latin typeface="游明朝"/>
+              </a:rPr>
+              <a:t>シンラ
+（死ノ圧）</a:t>
+            </a:r>
+          </a:p>
+        </p:txBody>
+      </p:sp>
+      <p:sp>
+        <p:nvSpPr>
+          <p:cNvPr id="21" name="TextBox 20"/>
+          <p:cNvSpPr txBox="1"/>
+          <p:nvPr/>
+        </p:nvSpPr>
+        <p:spPr>
+          <a:xfrm>
+            <a:off x="6100656" y="1358368"/>
+            <a:ext cx="2757312" cy="340000"/>
+          </a:xfrm>
+          <a:prstGeom prst="rect">
+            <a:avLst/>
+          </a:prstGeom>
+          <a:noFill/>
+        </p:spPr>
+        <p:txBody>
+          <a:bodyPr wrap="square">
+            <a:spAutoFit/>
+          </a:bodyPr>
+          <a:lstStyle/>
+          <a:p>
+            <a:pPr algn="ctr"/>
+            <a:r>
+              <a:rPr sz="1000" b="1">
+                <a:solidFill>
+                  <a:srgbClr val="FFBB44"/>
+                </a:solidFill>
+                <a:latin typeface="メイリオ"/>
+              </a:rPr>
+              <a:t>設定6
+確定</a:t>
+            </a:r>
+          </a:p>
+        </p:txBody>
+      </p:sp>
+      <p:sp>
+        <p:nvSpPr>
+          <p:cNvPr id="22" name="Rectangle 21"/>
+          <p:cNvSpPr/>
+          <p:nvPr/>
+        </p:nvSpPr>
+        <p:spPr>
+          <a:xfrm>
+            <a:off x="276032" y="1828368"/>
+            <a:ext cx="2842312" cy="330000"/>
+          </a:xfrm>
+          <a:prstGeom prst="rect">
+            <a:avLst/>
+          </a:prstGeom>
+          <a:solidFill>
+            <a:srgbClr val="DD5500"/>
+          </a:solidFill>
+          <a:ln>
+            <a:noFill/>
+          </a:ln>
+        </p:spPr>
+        <p:style>
+          <a:lnRef idx="1">
+            <a:schemeClr val="accent1"/>
+          </a:lnRef>
+          <a:fillRef idx="3">
+            <a:schemeClr val="accent1"/>
+          </a:fillRef>
+          <a:effectRef idx="2">
+            <a:schemeClr val="accent1"/>
+          </a:effectRef>
+          <a:fontRef idx="minor">
+            <a:schemeClr val="lt1"/>
+          </a:fontRef>
+        </p:style>
+        <p:txBody>
+          <a:bodyPr rtlCol="0" anchor="ctr"/>
+          <a:lstStyle/>
+          <a:p>
+            <a:pPr algn="ctr"/>
+          </a:p>
+        </p:txBody>
+      </p:sp>
+      <p:sp>
+        <p:nvSpPr>
+          <p:cNvPr id="23" name="TextBox 22"/>
+          <p:cNvSpPr txBox="1"/>
+          <p:nvPr/>
+        </p:nvSpPr>
+        <p:spPr>
+          <a:xfrm>
+            <a:off x="306032" y="1878368"/>
+            <a:ext cx="2797312" cy="250000"/>
+          </a:xfrm>
+          <a:prstGeom prst="rect">
+            <a:avLst/>
+          </a:prstGeom>
+          <a:noFill/>
+        </p:spPr>
+        <p:txBody>
+          <a:bodyPr wrap="none">
+            <a:spAutoFit/>
+          </a:bodyPr>
+          <a:lstStyle/>
+          <a:p>
+            <a:pPr algn="ctr"/>
+            <a:r>
+              <a:rPr sz="900" b="1">
+                <a:solidFill>
+                  <a:srgbClr val="05091E"/>
+                </a:solidFill>
+                <a:latin typeface="メイリオ"/>
+              </a:rPr>
+              <a:t>炎炎激闘の初当たり率</a:t>
+            </a:r>
+          </a:p>
+        </p:txBody>
+      </p:sp>
+      <p:sp>
+        <p:nvSpPr>
+          <p:cNvPr id="24" name="Rectangle 23"/>
+          <p:cNvSpPr/>
+          <p:nvPr/>
+        </p:nvSpPr>
+        <p:spPr>
+          <a:xfrm>
+            <a:off x="276032" y="2158368"/>
+            <a:ext cx="2842312" cy="1060000"/>
+          </a:xfrm>
+          <a:prstGeom prst="rect">
+            <a:avLst/>
+          </a:prstGeom>
+          <a:solidFill>
+            <a:srgbClr val="0C122C"/>
+          </a:solidFill>
+          <a:ln w="6350">
+            <a:solidFill>
+              <a:srgbClr val="DD5500"/>
+            </a:solidFill>
+          </a:ln>
+        </p:spPr>
+        <p:style>
+          <a:lnRef idx="1">
+            <a:schemeClr val="accent1"/>
+          </a:lnRef>
+          <a:fillRef idx="3">
+            <a:schemeClr val="accent1"/>
+          </a:fillRef>
+          <a:effectRef idx="2">
+            <a:schemeClr val="accent1"/>
+          </a:effectRef>
+          <a:fontRef idx="minor">
+            <a:schemeClr val="lt1"/>
+          </a:fontRef>
+        </p:style>
+        <p:txBody>
+          <a:bodyPr rtlCol="0" anchor="ctr"/>
+          <a:lstStyle/>
+          <a:p>
+            <a:pPr algn="ctr"/>
+          </a:p>
+        </p:txBody>
+      </p:sp>
+      <p:sp>
+        <p:nvSpPr>
+          <p:cNvPr id="25" name="TextBox 24"/>
+          <p:cNvSpPr txBox="1"/>
+          <p:nvPr/>
+        </p:nvSpPr>
+        <p:spPr>
+          <a:xfrm>
+            <a:off x="311032" y="2213368"/>
+            <a:ext cx="2787312" cy="255000"/>
+          </a:xfrm>
+          <a:prstGeom prst="rect">
+            <a:avLst/>
+          </a:prstGeom>
+          <a:noFill/>
+        </p:spPr>
+        <p:txBody>
+          <a:bodyPr wrap="square">
+            <a:spAutoFit/>
+          </a:bodyPr>
+          <a:lstStyle/>
+          <a:p>
+            <a:pPr algn="l"/>
+            <a:r>
+              <a:rPr sz="850" b="1">
+                <a:solidFill>
+                  <a:srgbClr val="DD5500"/>
+                </a:solidFill>
+                <a:latin typeface="メイリオ"/>
+              </a:rPr>
+              <a:t>最重要の設定差</a:t>
+            </a:r>
+          </a:p>
+        </p:txBody>
+      </p:sp>
+      <p:sp>
+        <p:nvSpPr>
+          <p:cNvPr id="26" name="TextBox 25"/>
+          <p:cNvSpPr txBox="1"/>
+          <p:nvPr/>
+        </p:nvSpPr>
+        <p:spPr>
+          <a:xfrm>
+            <a:off x="311032" y="2458368"/>
+            <a:ext cx="2787312" cy="680000"/>
+          </a:xfrm>
+          <a:prstGeom prst="rect">
+            <a:avLst/>
+          </a:prstGeom>
+          <a:noFill/>
+        </p:spPr>
+        <p:txBody>
+          <a:bodyPr wrap="square">
+            <a:spAutoFit/>
+          </a:bodyPr>
+          <a:lstStyle/>
+          <a:p>
+            <a:pPr algn="l"/>
+            <a:r>
+              <a:rPr sz="800" b="0">
+                <a:solidFill>
+                  <a:srgbClr val="E8ECFF"/>
+                </a:solidFill>
+                <a:latin typeface="メイリオ"/>
+              </a:rPr>
+              <a:t>炎炎激闘の初当たり率が
+設定によって大きく異なる。</a:t>
+            </a:r>
+          </a:p>
+        </p:txBody>
+      </p:sp>
+      <p:sp>
+        <p:nvSpPr>
+          <p:cNvPr id="27" name="Rectangle 26"/>
+          <p:cNvSpPr/>
+          <p:nvPr/>
+        </p:nvSpPr>
+        <p:spPr>
+          <a:xfrm>
+            <a:off x="276032" y="3258368"/>
+            <a:ext cx="2842312" cy="1060000"/>
+          </a:xfrm>
+          <a:prstGeom prst="rect">
+            <a:avLst/>
+          </a:prstGeom>
+          <a:solidFill>
+            <a:srgbClr val="101632"/>
+          </a:solidFill>
+          <a:ln w="6350">
+            <a:solidFill>
+              <a:srgbClr val="DD5500"/>
+            </a:solidFill>
+          </a:ln>
+        </p:spPr>
+        <p:style>
+          <a:lnRef idx="1">
+            <a:schemeClr val="accent1"/>
+          </a:lnRef>
+          <a:fillRef idx="3">
+            <a:schemeClr val="accent1"/>
+          </a:fillRef>
+          <a:effectRef idx="2">
+            <a:schemeClr val="accent1"/>
+          </a:effectRef>
+          <a:fontRef idx="minor">
+            <a:schemeClr val="lt1"/>
+          </a:fontRef>
+        </p:style>
+        <p:txBody>
+          <a:bodyPr rtlCol="0" anchor="ctr"/>
+          <a:lstStyle/>
+          <a:p>
+            <a:pPr algn="ctr"/>
+          </a:p>
+        </p:txBody>
+      </p:sp>
+      <p:sp>
+        <p:nvSpPr>
+          <p:cNvPr id="28" name="TextBox 27"/>
+          <p:cNvSpPr txBox="1"/>
+          <p:nvPr/>
+        </p:nvSpPr>
+        <p:spPr>
+          <a:xfrm>
+            <a:off x="311032" y="3313368"/>
+            <a:ext cx="2787312" cy="255000"/>
+          </a:xfrm>
+          <a:prstGeom prst="rect">
+            <a:avLst/>
+          </a:prstGeom>
+          <a:noFill/>
+        </p:spPr>
+        <p:txBody>
+          <a:bodyPr wrap="square">
+            <a:spAutoFit/>
+          </a:bodyPr>
+          <a:lstStyle/>
+          <a:p>
+            <a:pPr algn="l"/>
+            <a:r>
+              <a:rPr sz="850" b="1">
+                <a:solidFill>
+                  <a:srgbClr val="DD5500"/>
+                </a:solidFill>
+                <a:latin typeface="メイリオ"/>
+              </a:rPr>
+              <a:t>長時間実戦で差が出る</a:t>
+            </a:r>
+          </a:p>
+        </p:txBody>
+      </p:sp>
+      <p:sp>
+        <p:nvSpPr>
+          <p:cNvPr id="29" name="TextBox 28"/>
+          <p:cNvSpPr txBox="1"/>
+          <p:nvPr/>
+        </p:nvSpPr>
+        <p:spPr>
+          <a:xfrm>
+            <a:off x="311032" y="3558368"/>
+            <a:ext cx="2787312" cy="680000"/>
+          </a:xfrm>
+          <a:prstGeom prst="rect">
+            <a:avLst/>
+          </a:prstGeom>
+          <a:noFill/>
+        </p:spPr>
+        <p:txBody>
+          <a:bodyPr wrap="square">
+            <a:spAutoFit/>
+          </a:bodyPr>
+          <a:lstStyle/>
+          <a:p>
+            <a:pPr algn="l"/>
+            <a:r>
+              <a:rPr sz="800" b="0">
+                <a:solidFill>
+                  <a:srgbClr val="E8ECFF"/>
+                </a:solidFill>
+                <a:latin typeface="メイリオ"/>
+              </a:rPr>
+              <a:t>数百G以上の実戦で
+感じられるレベルの差。</a:t>
+            </a:r>
+          </a:p>
+        </p:txBody>
+      </p:sp>
+      <p:sp>
+        <p:nvSpPr>
+          <p:cNvPr id="30" name="Rectangle 29"/>
+          <p:cNvSpPr/>
+          <p:nvPr/>
+        </p:nvSpPr>
+        <p:spPr>
+          <a:xfrm>
+            <a:off x="3153344" y="1828368"/>
+            <a:ext cx="2842312" cy="330000"/>
+          </a:xfrm>
+          <a:prstGeom prst="rect">
+            <a:avLst/>
+          </a:prstGeom>
+          <a:solidFill>
+            <a:srgbClr val="22CCDD"/>
+          </a:solidFill>
+          <a:ln>
+            <a:noFill/>
+          </a:ln>
+        </p:spPr>
+        <p:style>
+          <a:lnRef idx="1">
+            <a:schemeClr val="accent1"/>
+          </a:lnRef>
+          <a:fillRef idx="3">
+            <a:schemeClr val="accent1"/>
+          </a:fillRef>
+          <a:effectRef idx="2">
+            <a:schemeClr val="accent1"/>
+          </a:effectRef>
+          <a:fontRef idx="minor">
+            <a:schemeClr val="lt1"/>
+          </a:fontRef>
+        </p:style>
+        <p:txBody>
+          <a:bodyPr rtlCol="0" anchor="ctr"/>
+          <a:lstStyle/>
+          <a:p>
+            <a:pPr algn="ctr"/>
+          </a:p>
+        </p:txBody>
+      </p:sp>
+      <p:sp>
+        <p:nvSpPr>
+          <p:cNvPr id="31" name="TextBox 30"/>
+          <p:cNvSpPr txBox="1"/>
+          <p:nvPr/>
+        </p:nvSpPr>
+        <p:spPr>
+          <a:xfrm>
+            <a:off x="3183344" y="1878368"/>
+            <a:ext cx="2797312" cy="250000"/>
+          </a:xfrm>
+          <a:prstGeom prst="rect">
+            <a:avLst/>
+          </a:prstGeom>
+          <a:noFill/>
+        </p:spPr>
+        <p:txBody>
+          <a:bodyPr wrap="none">
+            <a:spAutoFit/>
+          </a:bodyPr>
+          <a:lstStyle/>
+          <a:p>
+            <a:pPr algn="ctr"/>
+            <a:r>
+              <a:rPr sz="900" b="1">
+                <a:solidFill>
+                  <a:srgbClr val="05091E"/>
+                </a:solidFill>
+                <a:latin typeface="メイリオ"/>
+              </a:rPr>
+              <a:t>伝導者の罠 成功率</a:t>
+            </a:r>
+          </a:p>
+        </p:txBody>
+      </p:sp>
+      <p:sp>
+        <p:nvSpPr>
+          <p:cNvPr id="32" name="Rectangle 31"/>
+          <p:cNvSpPr/>
+          <p:nvPr/>
+        </p:nvSpPr>
+        <p:spPr>
+          <a:xfrm>
+            <a:off x="3153344" y="2158368"/>
+            <a:ext cx="2842312" cy="1060000"/>
+          </a:xfrm>
+          <a:prstGeom prst="rect">
+            <a:avLst/>
+          </a:prstGeom>
+          <a:solidFill>
+            <a:srgbClr val="0C122C"/>
+          </a:solidFill>
+          <a:ln w="6350">
+            <a:solidFill>
+              <a:srgbClr val="22CCDD"/>
+            </a:solidFill>
+          </a:ln>
+        </p:spPr>
+        <p:style>
+          <a:lnRef idx="1">
+            <a:schemeClr val="accent1"/>
+          </a:lnRef>
+          <a:fillRef idx="3">
+            <a:schemeClr val="accent1"/>
+          </a:fillRef>
+          <a:effectRef idx="2">
+            <a:schemeClr val="accent1"/>
+          </a:effectRef>
+          <a:fontRef idx="minor">
+            <a:schemeClr val="lt1"/>
+          </a:fontRef>
+        </p:style>
+        <p:txBody>
+          <a:bodyPr rtlCol="0" anchor="ctr"/>
+          <a:lstStyle/>
+          <a:p>
+            <a:pPr algn="ctr"/>
+          </a:p>
+        </p:txBody>
+      </p:sp>
+      <p:sp>
+        <p:nvSpPr>
+          <p:cNvPr id="33" name="TextBox 32"/>
+          <p:cNvSpPr txBox="1"/>
+          <p:nvPr/>
+        </p:nvSpPr>
+        <p:spPr>
+          <a:xfrm>
+            <a:off x="3188344" y="2213368"/>
+            <a:ext cx="2787312" cy="255000"/>
+          </a:xfrm>
+          <a:prstGeom prst="rect">
+            <a:avLst/>
+          </a:prstGeom>
+          <a:noFill/>
+        </p:spPr>
+        <p:txBody>
+          <a:bodyPr wrap="square">
+            <a:spAutoFit/>
+          </a:bodyPr>
+          <a:lstStyle/>
+          <a:p>
+            <a:pPr algn="l"/>
+            <a:r>
+              <a:rPr sz="850" b="1">
+                <a:solidFill>
+                  <a:srgbClr val="22CCDD"/>
+                </a:solidFill>
+                <a:latin typeface="メイリオ"/>
+              </a:rPr>
+              <a:t>成功期待度約40%（全体）</a:t>
+            </a:r>
+          </a:p>
+        </p:txBody>
+      </p:sp>
+      <p:sp>
+        <p:nvSpPr>
+          <p:cNvPr id="34" name="TextBox 33"/>
+          <p:cNvSpPr txBox="1"/>
+          <p:nvPr/>
+        </p:nvSpPr>
+        <p:spPr>
+          <a:xfrm>
+            <a:off x="3188344" y="2458368"/>
+            <a:ext cx="2787312" cy="680000"/>
+          </a:xfrm>
+          <a:prstGeom prst="rect">
+            <a:avLst/>
+          </a:prstGeom>
+          <a:noFill/>
+        </p:spPr>
+        <p:txBody>
+          <a:bodyPr wrap="square">
+            <a:spAutoFit/>
+          </a:bodyPr>
+          <a:lstStyle/>
+          <a:p>
+            <a:pPr algn="l"/>
+            <a:r>
+              <a:rPr sz="800" b="0">
+                <a:solidFill>
+                  <a:srgbClr val="E8ECFF"/>
+                </a:solidFill>
+                <a:latin typeface="メイリオ"/>
+              </a:rPr>
+              <a:t>高設定ほど成功率が高い。
+通過回数を記録して判断。</a:t>
+            </a:r>
+          </a:p>
+        </p:txBody>
+      </p:sp>
+      <p:sp>
+        <p:nvSpPr>
+          <p:cNvPr id="35" name="Rectangle 34"/>
+          <p:cNvSpPr/>
+          <p:nvPr/>
+        </p:nvSpPr>
+        <p:spPr>
+          <a:xfrm>
+            <a:off x="3153344" y="3258368"/>
+            <a:ext cx="2842312" cy="1060000"/>
+          </a:xfrm>
+          <a:prstGeom prst="rect">
+            <a:avLst/>
+          </a:prstGeom>
+          <a:solidFill>
+            <a:srgbClr val="101632"/>
+          </a:solidFill>
+          <a:ln w="6350">
+            <a:solidFill>
+              <a:srgbClr val="22CCDD"/>
+            </a:solidFill>
+          </a:ln>
+        </p:spPr>
+        <p:style>
+          <a:lnRef idx="1">
+            <a:schemeClr val="accent1"/>
+          </a:lnRef>
+          <a:fillRef idx="3">
+            <a:schemeClr val="accent1"/>
+          </a:fillRef>
+          <a:effectRef idx="2">
+            <a:schemeClr val="accent1"/>
+          </a:effectRef>
+          <a:fontRef idx="minor">
+            <a:schemeClr val="lt1"/>
+          </a:fontRef>
+        </p:style>
+        <p:txBody>
+          <a:bodyPr rtlCol="0" anchor="ctr"/>
+          <a:lstStyle/>
+          <a:p>
+            <a:pPr algn="ctr"/>
+          </a:p>
+        </p:txBody>
+      </p:sp>
+      <p:sp>
+        <p:nvSpPr>
+          <p:cNvPr id="36" name="TextBox 35"/>
+          <p:cNvSpPr txBox="1"/>
+          <p:nvPr/>
+        </p:nvSpPr>
+        <p:spPr>
+          <a:xfrm>
+            <a:off x="3188344" y="3313368"/>
+            <a:ext cx="2787312" cy="255000"/>
+          </a:xfrm>
+          <a:prstGeom prst="rect">
+            <a:avLst/>
+          </a:prstGeom>
+          <a:noFill/>
+        </p:spPr>
+        <p:txBody>
+          <a:bodyPr wrap="square">
+            <a:spAutoFit/>
+          </a:bodyPr>
+          <a:lstStyle/>
+          <a:p>
+            <a:pPr algn="l"/>
+            <a:r>
+              <a:rPr sz="850" b="1">
+                <a:solidFill>
+                  <a:srgbClr val="22CCDD"/>
+                </a:solidFill>
+                <a:latin typeface="メイリオ"/>
+              </a:rPr>
+              <a:t>十字目変換率にも差</a:t>
+            </a:r>
+          </a:p>
+        </p:txBody>
+      </p:sp>
+      <p:sp>
+        <p:nvSpPr>
+          <p:cNvPr id="37" name="TextBox 36"/>
+          <p:cNvSpPr txBox="1"/>
+          <p:nvPr/>
+        </p:nvSpPr>
+        <p:spPr>
+          <a:xfrm>
+            <a:off x="3188344" y="3558368"/>
+            <a:ext cx="2787312" cy="680000"/>
+          </a:xfrm>
+          <a:prstGeom prst="rect">
+            <a:avLst/>
+          </a:prstGeom>
+          <a:noFill/>
+        </p:spPr>
+        <p:txBody>
+          <a:bodyPr wrap="square">
+            <a:spAutoFit/>
+          </a:bodyPr>
+          <a:lstStyle/>
+          <a:p>
+            <a:pPr algn="l"/>
+            <a:r>
+              <a:rPr sz="800" b="0">
+                <a:solidFill>
+                  <a:srgbClr val="E8ECFF"/>
+                </a:solidFill>
+                <a:latin typeface="メイリオ"/>
+              </a:rPr>
+              <a:t>ボーナス契機となる
+十字目変換率も高設定優遇。</a:t>
+            </a:r>
+          </a:p>
+        </p:txBody>
+      </p:sp>
+      <p:sp>
+        <p:nvSpPr>
+          <p:cNvPr id="38" name="Rectangle 37"/>
+          <p:cNvSpPr/>
+          <p:nvPr/>
+        </p:nvSpPr>
+        <p:spPr>
+          <a:xfrm>
+            <a:off x="6030656" y="1828368"/>
+            <a:ext cx="2842312" cy="330000"/>
+          </a:xfrm>
+          <a:prstGeom prst="rect">
+            <a:avLst/>
+          </a:prstGeom>
+          <a:solidFill>
+            <a:srgbClr val="2277FF"/>
+          </a:solidFill>
+          <a:ln>
+            <a:noFill/>
+          </a:ln>
+        </p:spPr>
+        <p:style>
+          <a:lnRef idx="1">
+            <a:schemeClr val="accent1"/>
+          </a:lnRef>
+          <a:fillRef idx="3">
+            <a:schemeClr val="accent1"/>
+          </a:fillRef>
+          <a:effectRef idx="2">
+            <a:schemeClr val="accent1"/>
+          </a:effectRef>
+          <a:fontRef idx="minor">
+            <a:schemeClr val="lt1"/>
+          </a:fontRef>
+        </p:style>
+        <p:txBody>
+          <a:bodyPr rtlCol="0" anchor="ctr"/>
+          <a:lstStyle/>
+          <a:p>
+            <a:pPr algn="ctr"/>
+          </a:p>
+        </p:txBody>
+      </p:sp>
+      <p:sp>
+        <p:nvSpPr>
+          <p:cNvPr id="39" name="TextBox 38"/>
+          <p:cNvSpPr txBox="1"/>
+          <p:nvPr/>
+        </p:nvSpPr>
+        <p:spPr>
+          <a:xfrm>
+            <a:off x="6060656" y="1878368"/>
+            <a:ext cx="2797312" cy="250000"/>
+          </a:xfrm>
+          <a:prstGeom prst="rect">
+            <a:avLst/>
+          </a:prstGeom>
+          <a:noFill/>
+        </p:spPr>
+        <p:txBody>
+          <a:bodyPr wrap="none">
+            <a:spAutoFit/>
+          </a:bodyPr>
+          <a:lstStyle/>
+          <a:p>
+            <a:pPr algn="ctr"/>
+            <a:r>
+              <a:rPr sz="900" b="1">
+                <a:solidFill>
+                  <a:srgbClr val="05091E"/>
+                </a:solidFill>
+                <a:latin typeface="メイリオ"/>
+              </a:rPr>
+              <a:t>ボーナス終了画面</a:t>
+            </a:r>
+          </a:p>
+        </p:txBody>
+      </p:sp>
+      <p:sp>
+        <p:nvSpPr>
+          <p:cNvPr id="40" name="Rectangle 39"/>
+          <p:cNvSpPr/>
+          <p:nvPr/>
+        </p:nvSpPr>
+        <p:spPr>
+          <a:xfrm>
+            <a:off x="6030656" y="2158368"/>
+            <a:ext cx="2842312" cy="1060000"/>
+          </a:xfrm>
+          <a:prstGeom prst="rect">
+            <a:avLst/>
+          </a:prstGeom>
+          <a:solidFill>
+            <a:srgbClr val="0C122C"/>
+          </a:solidFill>
+          <a:ln w="6350">
+            <a:solidFill>
+              <a:srgbClr val="2277FF"/>
+            </a:solidFill>
+          </a:ln>
+        </p:spPr>
+        <p:style>
+          <a:lnRef idx="1">
+            <a:schemeClr val="accent1"/>
+          </a:lnRef>
+          <a:fillRef idx="3">
+            <a:schemeClr val="accent1"/>
+          </a:fillRef>
+          <a:effectRef idx="2">
+            <a:schemeClr val="accent1"/>
+          </a:effectRef>
+          <a:fontRef idx="minor">
+            <a:schemeClr val="lt1"/>
+          </a:fontRef>
+        </p:style>
+        <p:txBody>
+          <a:bodyPr rtlCol="0" anchor="ctr"/>
+          <a:lstStyle/>
+          <a:p>
+            <a:pPr algn="ctr"/>
+          </a:p>
+        </p:txBody>
+      </p:sp>
+      <p:sp>
+        <p:nvSpPr>
+          <p:cNvPr id="41" name="TextBox 40"/>
+          <p:cNvSpPr txBox="1"/>
+          <p:nvPr/>
+        </p:nvSpPr>
+        <p:spPr>
+          <a:xfrm>
+            <a:off x="6065656" y="2213368"/>
+            <a:ext cx="2787312" cy="255000"/>
+          </a:xfrm>
+          <a:prstGeom prst="rect">
+            <a:avLst/>
+          </a:prstGeom>
+          <a:noFill/>
+        </p:spPr>
+        <p:txBody>
+          <a:bodyPr wrap="square">
+            <a:spAutoFit/>
+          </a:bodyPr>
+          <a:lstStyle/>
+          <a:p>
+            <a:pPr algn="l"/>
+            <a:r>
+              <a:rPr sz="850" b="1">
+                <a:solidFill>
+                  <a:srgbClr val="2277FF"/>
+                </a:solidFill>
+                <a:latin typeface="メイリオ"/>
+              </a:rPr>
+              <a:t>各ボーナス後に示唆</a:t>
+            </a:r>
+          </a:p>
+        </p:txBody>
+      </p:sp>
+      <p:sp>
+        <p:nvSpPr>
+          <p:cNvPr id="42" name="TextBox 41"/>
+          <p:cNvSpPr txBox="1"/>
+          <p:nvPr/>
+        </p:nvSpPr>
+        <p:spPr>
+          <a:xfrm>
+            <a:off x="6065656" y="2458368"/>
+            <a:ext cx="2787312" cy="680000"/>
+          </a:xfrm>
+          <a:prstGeom prst="rect">
+            <a:avLst/>
+          </a:prstGeom>
+          <a:noFill/>
+        </p:spPr>
+        <p:txBody>
+          <a:bodyPr wrap="square">
+            <a:spAutoFit/>
+          </a:bodyPr>
+          <a:lstStyle/>
+          <a:p>
+            <a:pPr algn="l"/>
+            <a:r>
+              <a:rPr sz="800" b="0">
+                <a:solidFill>
+                  <a:srgbClr val="E8ECFF"/>
+                </a:solidFill>
+                <a:latin typeface="メイリオ"/>
+              </a:rPr>
+              <a:t>ボーナス終了後の
+画面に設定示唆あり。</a:t>
+            </a:r>
+          </a:p>
+        </p:txBody>
+      </p:sp>
+      <p:sp>
+        <p:nvSpPr>
+          <p:cNvPr id="43" name="Rectangle 42"/>
+          <p:cNvSpPr/>
+          <p:nvPr/>
+        </p:nvSpPr>
+        <p:spPr>
+          <a:xfrm>
+            <a:off x="6030656" y="3258368"/>
+            <a:ext cx="2842312" cy="1060000"/>
+          </a:xfrm>
+          <a:prstGeom prst="rect">
+            <a:avLst/>
+          </a:prstGeom>
+          <a:solidFill>
+            <a:srgbClr val="101632"/>
+          </a:solidFill>
+          <a:ln w="6350">
+            <a:solidFill>
+              <a:srgbClr val="2277FF"/>
+            </a:solidFill>
+          </a:ln>
+        </p:spPr>
+        <p:style>
+          <a:lnRef idx="1">
+            <a:schemeClr val="accent1"/>
+          </a:lnRef>
+          <a:fillRef idx="3">
+            <a:schemeClr val="accent1"/>
+          </a:fillRef>
+          <a:effectRef idx="2">
+            <a:schemeClr val="accent1"/>
+          </a:effectRef>
+          <a:fontRef idx="minor">
+            <a:schemeClr val="lt1"/>
+          </a:fontRef>
+        </p:style>
+        <p:txBody>
+          <a:bodyPr rtlCol="0" anchor="ctr"/>
+          <a:lstStyle/>
+          <a:p>
+            <a:pPr algn="ctr"/>
+          </a:p>
+        </p:txBody>
+      </p:sp>
+      <p:sp>
+        <p:nvSpPr>
+          <p:cNvPr id="44" name="TextBox 43"/>
+          <p:cNvSpPr txBox="1"/>
+          <p:nvPr/>
+        </p:nvSpPr>
+        <p:spPr>
+          <a:xfrm>
+            <a:off x="6065656" y="3313368"/>
+            <a:ext cx="2787312" cy="255000"/>
+          </a:xfrm>
+          <a:prstGeom prst="rect">
+            <a:avLst/>
+          </a:prstGeom>
+          <a:noFill/>
+        </p:spPr>
+        <p:txBody>
+          <a:bodyPr wrap="square">
+            <a:spAutoFit/>
+          </a:bodyPr>
+          <a:lstStyle/>
+          <a:p>
+            <a:pPr algn="l"/>
+            <a:r>
+              <a:rPr sz="850" b="1">
+                <a:solidFill>
+                  <a:srgbClr val="2277FF"/>
+                </a:solidFill>
+                <a:latin typeface="メイリオ"/>
+              </a:rPr>
+              <a:t>複数回確認で精度UP</a:t>
+            </a:r>
+          </a:p>
+        </p:txBody>
+      </p:sp>
+      <p:sp>
+        <p:nvSpPr>
+          <p:cNvPr id="45" name="TextBox 44"/>
+          <p:cNvSpPr txBox="1"/>
+          <p:nvPr/>
+        </p:nvSpPr>
+        <p:spPr>
+          <a:xfrm>
+            <a:off x="6065656" y="3558368"/>
+            <a:ext cx="2787312" cy="680000"/>
+          </a:xfrm>
+          <a:prstGeom prst="rect">
+            <a:avLst/>
+          </a:prstGeom>
+          <a:noFill/>
+        </p:spPr>
+        <p:txBody>
+          <a:bodyPr wrap="square">
+            <a:spAutoFit/>
+          </a:bodyPr>
+          <a:lstStyle/>
+          <a:p>
+            <a:pPr algn="l"/>
+            <a:r>
+              <a:rPr sz="800" b="0">
+                <a:solidFill>
+                  <a:srgbClr val="E8ECFF"/>
+                </a:solidFill>
+                <a:latin typeface="メイリオ"/>
+              </a:rPr>
+              <a:t>単発では判断難しいため
+複数回のデータを積む。</a:t>
+            </a:r>
+          </a:p>
+        </p:txBody>
+      </p:sp>
+      <p:sp>
+        <p:nvSpPr>
+          <p:cNvPr id="46" name="TextBox 45"/>
+          <p:cNvSpPr txBox="1"/>
+          <p:nvPr/>
+        </p:nvSpPr>
+        <p:spPr>
+          <a:xfrm>
+            <a:off x="7498079" y="4919472"/>
+            <a:ext cx="1554480" cy="180000"/>
+          </a:xfrm>
+          <a:prstGeom prst="rect">
+            <a:avLst/>
+          </a:prstGeom>
+          <a:noFill/>
+        </p:spPr>
+        <p:txBody>
+          <a:bodyPr wrap="square">
+            <a:spAutoFit/>
+          </a:bodyPr>
+          <a:lstStyle/>
+          <a:p>
+            <a:pPr algn="r"/>
+            <a:r>
+              <a:rPr sz="700" b="0">
+                <a:solidFill>
+                  <a:srgbClr val="8888AA"/>
+                </a:solidFill>
+                <a:latin typeface="メイリオ"/>
+              </a:rPr>
+              <a:t>※ネット解析情報より</a:t>
+            </a:r>
+          </a:p>
+        </p:txBody>
+      </p:sp>
+    </p:spTree>
+  </p:cSld>
+  <p:clrMapOvr>
+    <a:masterClrMapping/>
+  </p:clrMapOvr>
+</p:sld>
+</file>
+
+<file path=ppt/slides/slide8.xml><?xml version="1.0" encoding="utf-8"?>
+<p:sld xmlns:a="http://schemas.openxmlformats.org/drawingml/2006/main" xmlns:p="http://schemas.openxmlformats.org/presentationml/2006/main" xmlns:r="http://schemas.openxmlformats.org/officeDocument/2006/relationships">
+  <p:cSld>
+    <p:spTree>
+      <p:nvGrpSpPr>
+        <p:cNvPr id="1" name=""/>
+        <p:cNvGrpSpPr/>
+        <p:nvPr/>
+      </p:nvGrpSpPr>
+      <p:grpSpPr/>
+      <p:pic>
+        <p:nvPicPr>
+          <p:cNvPr id="2" name="Picture 1" descr="image.png"/>
+          <p:cNvPicPr>
+            <a:picLocks noChangeAspect="1"/>
+          </p:cNvPicPr>
+          <p:nvPr/>
+        </p:nvPicPr>
+        <p:blipFill>
+          <a:blip r:embed="rId2"/>
+          <a:stretch>
+            <a:fillRect/>
+          </a:stretch>
+        </p:blipFill>
+        <p:spPr>
+          <a:xfrm>
+            <a:off x="0" y="0"/>
+            <a:ext cx="9144000" cy="5143500"/>
+          </a:xfrm>
+          <a:prstGeom prst="rect">
+            <a:avLst/>
+          </a:prstGeom>
+        </p:spPr>
+      </p:pic>
+      <p:sp>
+        <p:nvSpPr>
+          <p:cNvPr id="3" name="Rectangle 2"/>
+          <p:cNvSpPr/>
+          <p:nvPr/>
+        </p:nvSpPr>
+        <p:spPr>
+          <a:xfrm>
+            <a:off x="0" y="0"/>
+            <a:ext cx="9144000" cy="530352"/>
+          </a:xfrm>
+          <a:prstGeom prst="rect">
+            <a:avLst/>
+          </a:prstGeom>
+          <a:solidFill>
+            <a:srgbClr val="0C122C"/>
+          </a:solidFill>
+          <a:ln>
+            <a:noFill/>
+          </a:ln>
+        </p:spPr>
+        <p:style>
+          <a:lnRef idx="1">
+            <a:schemeClr val="accent1"/>
+          </a:lnRef>
+          <a:fillRef idx="3">
+            <a:schemeClr val="accent1"/>
+          </a:fillRef>
+          <a:effectRef idx="2">
+            <a:schemeClr val="accent1"/>
+          </a:effectRef>
+          <a:fontRef idx="minor">
+            <a:schemeClr val="lt1"/>
+          </a:fontRef>
+        </p:style>
+        <p:txBody>
+          <a:bodyPr rtlCol="0" anchor="ctr"/>
+          <a:lstStyle/>
+          <a:p>
+            <a:pPr algn="ctr"/>
+          </a:p>
+        </p:txBody>
+      </p:sp>
+      <p:sp>
+        <p:nvSpPr>
+          <p:cNvPr id="4" name="Rectangle 3"/>
+          <p:cNvSpPr/>
+          <p:nvPr/>
+        </p:nvSpPr>
+        <p:spPr>
+          <a:xfrm>
+            <a:off x="0" y="0"/>
+            <a:ext cx="45000" cy="530352"/>
+          </a:xfrm>
+          <a:prstGeom prst="rect">
+            <a:avLst/>
+          </a:prstGeom>
+          <a:solidFill>
+            <a:srgbClr val="DD5500"/>
+          </a:solidFill>
+          <a:ln>
+            <a:noFill/>
+          </a:ln>
+        </p:spPr>
+        <p:style>
+          <a:lnRef idx="1">
+            <a:schemeClr val="accent1"/>
+          </a:lnRef>
+          <a:fillRef idx="3">
+            <a:schemeClr val="accent1"/>
+          </a:fillRef>
+          <a:effectRef idx="2">
+            <a:schemeClr val="accent1"/>
+          </a:effectRef>
+          <a:fontRef idx="minor">
+            <a:schemeClr val="lt1"/>
+          </a:fontRef>
+        </p:style>
+        <p:txBody>
+          <a:bodyPr rtlCol="0" anchor="ctr"/>
+          <a:lstStyle/>
+          <a:p>
+            <a:pPr algn="ctr"/>
+          </a:p>
+        </p:txBody>
+      </p:sp>
+      <p:sp>
+        <p:nvSpPr>
+          <p:cNvPr id="5" name="TextBox 4"/>
+          <p:cNvSpPr txBox="1"/>
+          <p:nvPr/>
+        </p:nvSpPr>
+        <p:spPr>
+          <a:xfrm>
+            <a:off x="137160" y="28000"/>
+            <a:ext cx="7772400" cy="410000"/>
+          </a:xfrm>
+          <a:prstGeom prst="rect">
+            <a:avLst/>
+          </a:prstGeom>
+          <a:noFill/>
+        </p:spPr>
+        <p:txBody>
+          <a:bodyPr wrap="square">
+            <a:spAutoFit/>
+          </a:bodyPr>
+          <a:lstStyle/>
+          <a:p>
+            <a:pPr algn="l"/>
+            <a:r>
+              <a:rPr sz="1400" b="1">
+                <a:solidFill>
+                  <a:srgbClr val="FFBB44"/>
+                </a:solidFill>
+                <a:latin typeface="游明朝"/>
+              </a:rPr>
+              <a:t>まとめ ── 設計から学べること</a:t>
+            </a:r>
+          </a:p>
+        </p:txBody>
+      </p:sp>
+      <p:sp>
+        <p:nvSpPr>
+          <p:cNvPr id="6" name="TextBox 5"/>
+          <p:cNvSpPr txBox="1"/>
+          <p:nvPr/>
+        </p:nvSpPr>
+        <p:spPr>
+          <a:xfrm>
+            <a:off x="8046720" y="45000"/>
+            <a:ext cx="914400" cy="340000"/>
+          </a:xfrm>
+          <a:prstGeom prst="rect">
+            <a:avLst/>
+          </a:prstGeom>
+          <a:noFill/>
+        </p:spPr>
+        <p:txBody>
+          <a:bodyPr wrap="square">
+            <a:spAutoFit/>
+          </a:bodyPr>
+          <a:lstStyle/>
+          <a:p>
+            <a:pPr algn="r"/>
+            <a:r>
+              <a:rPr sz="800" b="0">
+                <a:solidFill>
+                  <a:srgbClr val="8888AA"/>
+                </a:solidFill>
+                <a:latin typeface="メイリオ"/>
+              </a:rPr>
+              <a:t>8/8</a:t>
             </a:r>
           </a:p>
         </p:txBody>
